--- a/Fig/B样条基函数递推.pptx
+++ b/Fig/B样条基函数递推.pptx
@@ -107,12 +107,12 @@
   <p:extLst>
     <p:ext uri="{EFAFB233-063F-42B5-8137-9DF3F51BA10A}">
       <p15:sldGuideLst xmlns:p15="http://schemas.microsoft.com/office/powerpoint/2012/main">
-        <p15:guide id="1" orient="horz" pos="635" userDrawn="1">
+        <p15:guide id="1" orient="horz" pos="672" userDrawn="1">
           <p15:clr>
             <a:srgbClr val="A4A3A4"/>
           </p15:clr>
         </p15:guide>
-        <p15:guide id="2" pos="1134" userDrawn="1">
+        <p15:guide id="2" pos="1118" userDrawn="1">
           <p15:clr>
             <a:srgbClr val="A4A3A4"/>
           </p15:clr>
@@ -3081,18 +3081,27 @@
       </p:grpSpPr>
       <p:sp>
         <p:nvSpPr>
-          <p:cNvPr id="4" name="矩形 3"/>
+          <p:cNvPr id="130" name="矩形 129"/>
           <p:cNvSpPr/>
           <p:nvPr/>
         </p:nvSpPr>
         <p:spPr>
           <a:xfrm>
-            <a:off x="1032144" y="406541"/>
-            <a:ext cx="2400685" cy="1320223"/>
+            <a:off x="1163320" y="54610"/>
+            <a:ext cx="260350" cy="171450"/>
           </a:xfrm>
           <a:prstGeom prst="rect">
             <a:avLst/>
           </a:prstGeom>
+          <a:solidFill>
+            <a:schemeClr val="accent1">
+              <a:lumMod val="60000"/>
+              <a:lumOff val="40000"/>
+            </a:schemeClr>
+          </a:solidFill>
+          <a:ln>
+            <a:noFill/>
+          </a:ln>
         </p:spPr>
         <p:style>
           <a:lnRef idx="2">
@@ -3114,38 +3123,564 @@
           <a:bodyPr rtlCol="0" anchor="ctr"/>
           <a:p>
             <a:pPr algn="ctr"/>
-            <a:endParaRPr lang="zh-CN" altLang="en-US" sz="1740"/>
+            <a:endParaRPr lang="zh-CN" altLang="en-US"/>
+          </a:p>
+        </p:txBody>
+      </p:sp>
+      <p:sp>
+        <p:nvSpPr>
+          <p:cNvPr id="131" name="矩形 130"/>
+          <p:cNvSpPr/>
+          <p:nvPr/>
+        </p:nvSpPr>
+        <p:spPr>
+          <a:xfrm>
+            <a:off x="1590675" y="54610"/>
+            <a:ext cx="260350" cy="171450"/>
+          </a:xfrm>
+          <a:prstGeom prst="rect">
+            <a:avLst/>
+          </a:prstGeom>
+          <a:solidFill>
+            <a:schemeClr val="accent1">
+              <a:lumMod val="60000"/>
+              <a:lumOff val="40000"/>
+            </a:schemeClr>
+          </a:solidFill>
+          <a:ln>
+            <a:noFill/>
+          </a:ln>
+        </p:spPr>
+        <p:style>
+          <a:lnRef idx="2">
+            <a:schemeClr val="accent1">
+              <a:lumMod val="75000"/>
+            </a:schemeClr>
+          </a:lnRef>
+          <a:fillRef idx="1">
+            <a:schemeClr val="accent1"/>
+          </a:fillRef>
+          <a:effectRef idx="0">
+            <a:srgbClr val="FFFFFF"/>
+          </a:effectRef>
+          <a:fontRef idx="minor">
+            <a:schemeClr val="lt1"/>
+          </a:fontRef>
+        </p:style>
+        <p:txBody>
+          <a:bodyPr rtlCol="0" anchor="ctr"/>
+          <a:p>
+            <a:pPr algn="ctr"/>
+            <a:endParaRPr lang="zh-CN" altLang="en-US"/>
+          </a:p>
+        </p:txBody>
+      </p:sp>
+      <p:sp>
+        <p:nvSpPr>
+          <p:cNvPr id="132" name="矩形 131"/>
+          <p:cNvSpPr/>
+          <p:nvPr/>
+        </p:nvSpPr>
+        <p:spPr>
+          <a:xfrm>
+            <a:off x="2054225" y="54610"/>
+            <a:ext cx="260350" cy="171450"/>
+          </a:xfrm>
+          <a:prstGeom prst="rect">
+            <a:avLst/>
+          </a:prstGeom>
+          <a:solidFill>
+            <a:schemeClr val="accent1">
+              <a:lumMod val="60000"/>
+              <a:lumOff val="40000"/>
+            </a:schemeClr>
+          </a:solidFill>
+          <a:ln>
+            <a:noFill/>
+          </a:ln>
+        </p:spPr>
+        <p:style>
+          <a:lnRef idx="2">
+            <a:schemeClr val="accent1">
+              <a:lumMod val="75000"/>
+            </a:schemeClr>
+          </a:lnRef>
+          <a:fillRef idx="1">
+            <a:schemeClr val="accent1"/>
+          </a:fillRef>
+          <a:effectRef idx="0">
+            <a:srgbClr val="FFFFFF"/>
+          </a:effectRef>
+          <a:fontRef idx="minor">
+            <a:schemeClr val="lt1"/>
+          </a:fontRef>
+        </p:style>
+        <p:txBody>
+          <a:bodyPr rtlCol="0" anchor="ctr"/>
+          <a:p>
+            <a:pPr algn="ctr"/>
+            <a:endParaRPr lang="zh-CN" altLang="en-US"/>
+          </a:p>
+        </p:txBody>
+      </p:sp>
+      <p:sp>
+        <p:nvSpPr>
+          <p:cNvPr id="133" name="矩形 132"/>
+          <p:cNvSpPr/>
+          <p:nvPr/>
+        </p:nvSpPr>
+        <p:spPr>
+          <a:xfrm>
+            <a:off x="2565400" y="54610"/>
+            <a:ext cx="260350" cy="171450"/>
+          </a:xfrm>
+          <a:prstGeom prst="rect">
+            <a:avLst/>
+          </a:prstGeom>
+          <a:solidFill>
+            <a:schemeClr val="accent1">
+              <a:lumMod val="60000"/>
+              <a:lumOff val="40000"/>
+            </a:schemeClr>
+          </a:solidFill>
+          <a:ln>
+            <a:noFill/>
+          </a:ln>
+        </p:spPr>
+        <p:style>
+          <a:lnRef idx="2">
+            <a:schemeClr val="accent1">
+              <a:lumMod val="75000"/>
+            </a:schemeClr>
+          </a:lnRef>
+          <a:fillRef idx="1">
+            <a:schemeClr val="accent1"/>
+          </a:fillRef>
+          <a:effectRef idx="0">
+            <a:srgbClr val="FFFFFF"/>
+          </a:effectRef>
+          <a:fontRef idx="minor">
+            <a:schemeClr val="lt1"/>
+          </a:fontRef>
+        </p:style>
+        <p:txBody>
+          <a:bodyPr rtlCol="0" anchor="ctr"/>
+          <a:p>
+            <a:pPr algn="ctr"/>
+            <a:endParaRPr lang="zh-CN" altLang="en-US"/>
+          </a:p>
+        </p:txBody>
+      </p:sp>
+      <p:sp>
+        <p:nvSpPr>
+          <p:cNvPr id="134" name="矩形 133"/>
+          <p:cNvSpPr/>
+          <p:nvPr/>
+        </p:nvSpPr>
+        <p:spPr>
+          <a:xfrm>
+            <a:off x="3019425" y="54610"/>
+            <a:ext cx="260350" cy="171450"/>
+          </a:xfrm>
+          <a:prstGeom prst="rect">
+            <a:avLst/>
+          </a:prstGeom>
+          <a:solidFill>
+            <a:schemeClr val="accent1">
+              <a:lumMod val="60000"/>
+              <a:lumOff val="40000"/>
+            </a:schemeClr>
+          </a:solidFill>
+          <a:ln>
+            <a:noFill/>
+          </a:ln>
+        </p:spPr>
+        <p:style>
+          <a:lnRef idx="2">
+            <a:schemeClr val="accent1">
+              <a:lumMod val="75000"/>
+            </a:schemeClr>
+          </a:lnRef>
+          <a:fillRef idx="1">
+            <a:schemeClr val="accent1"/>
+          </a:fillRef>
+          <a:effectRef idx="0">
+            <a:srgbClr val="FFFFFF"/>
+          </a:effectRef>
+          <a:fontRef idx="minor">
+            <a:schemeClr val="lt1"/>
+          </a:fontRef>
+        </p:style>
+        <p:txBody>
+          <a:bodyPr rtlCol="0" anchor="ctr"/>
+          <a:p>
+            <a:pPr algn="ctr"/>
+            <a:endParaRPr lang="zh-CN" altLang="en-US"/>
+          </a:p>
+        </p:txBody>
+      </p:sp>
+      <p:sp>
+        <p:nvSpPr>
+          <p:cNvPr id="127" name="矩形 126"/>
+          <p:cNvSpPr/>
+          <p:nvPr/>
+        </p:nvSpPr>
+        <p:spPr>
+          <a:xfrm>
+            <a:off x="38735" y="1616075"/>
+            <a:ext cx="368300" cy="171450"/>
+          </a:xfrm>
+          <a:prstGeom prst="rect">
+            <a:avLst/>
+          </a:prstGeom>
+          <a:solidFill>
+            <a:schemeClr val="accent1">
+              <a:lumMod val="60000"/>
+              <a:lumOff val="40000"/>
+            </a:schemeClr>
+          </a:solidFill>
+          <a:ln>
+            <a:noFill/>
+          </a:ln>
+        </p:spPr>
+        <p:style>
+          <a:lnRef idx="2">
+            <a:schemeClr val="accent1">
+              <a:lumMod val="75000"/>
+            </a:schemeClr>
+          </a:lnRef>
+          <a:fillRef idx="1">
+            <a:schemeClr val="accent1"/>
+          </a:fillRef>
+          <a:effectRef idx="0">
+            <a:srgbClr val="FFFFFF"/>
+          </a:effectRef>
+          <a:fontRef idx="minor">
+            <a:schemeClr val="lt1"/>
+          </a:fontRef>
+        </p:style>
+        <p:txBody>
+          <a:bodyPr rtlCol="0" anchor="ctr"/>
+          <a:p>
+            <a:pPr algn="ctr"/>
+            <a:endParaRPr lang="zh-CN" altLang="en-US"/>
+          </a:p>
+        </p:txBody>
+      </p:sp>
+      <p:sp>
+        <p:nvSpPr>
+          <p:cNvPr id="128" name="矩形 127"/>
+          <p:cNvSpPr/>
+          <p:nvPr/>
+        </p:nvSpPr>
+        <p:spPr>
+          <a:xfrm>
+            <a:off x="38735" y="1335405"/>
+            <a:ext cx="368300" cy="171450"/>
+          </a:xfrm>
+          <a:prstGeom prst="rect">
+            <a:avLst/>
+          </a:prstGeom>
+          <a:solidFill>
+            <a:schemeClr val="accent1">
+              <a:lumMod val="60000"/>
+              <a:lumOff val="40000"/>
+            </a:schemeClr>
+          </a:solidFill>
+          <a:ln>
+            <a:noFill/>
+          </a:ln>
+        </p:spPr>
+        <p:style>
+          <a:lnRef idx="2">
+            <a:schemeClr val="accent1">
+              <a:lumMod val="75000"/>
+            </a:schemeClr>
+          </a:lnRef>
+          <a:fillRef idx="1">
+            <a:schemeClr val="accent1"/>
+          </a:fillRef>
+          <a:effectRef idx="0">
+            <a:srgbClr val="FFFFFF"/>
+          </a:effectRef>
+          <a:fontRef idx="minor">
+            <a:schemeClr val="lt1"/>
+          </a:fontRef>
+        </p:style>
+        <p:txBody>
+          <a:bodyPr rtlCol="0" anchor="ctr"/>
+          <a:p>
+            <a:pPr algn="ctr"/>
+            <a:endParaRPr lang="zh-CN" altLang="en-US"/>
+          </a:p>
+        </p:txBody>
+      </p:sp>
+      <p:sp>
+        <p:nvSpPr>
+          <p:cNvPr id="129" name="矩形 128"/>
+          <p:cNvSpPr/>
+          <p:nvPr/>
+        </p:nvSpPr>
+        <p:spPr>
+          <a:xfrm>
+            <a:off x="38735" y="1056005"/>
+            <a:ext cx="368300" cy="171450"/>
+          </a:xfrm>
+          <a:prstGeom prst="rect">
+            <a:avLst/>
+          </a:prstGeom>
+          <a:solidFill>
+            <a:schemeClr val="accent1">
+              <a:lumMod val="60000"/>
+              <a:lumOff val="40000"/>
+            </a:schemeClr>
+          </a:solidFill>
+          <a:ln>
+            <a:noFill/>
+          </a:ln>
+        </p:spPr>
+        <p:style>
+          <a:lnRef idx="2">
+            <a:schemeClr val="accent1">
+              <a:lumMod val="75000"/>
+            </a:schemeClr>
+          </a:lnRef>
+          <a:fillRef idx="1">
+            <a:schemeClr val="accent1"/>
+          </a:fillRef>
+          <a:effectRef idx="0">
+            <a:srgbClr val="FFFFFF"/>
+          </a:effectRef>
+          <a:fontRef idx="minor">
+            <a:schemeClr val="lt1"/>
+          </a:fontRef>
+        </p:style>
+        <p:txBody>
+          <a:bodyPr rtlCol="0" anchor="ctr"/>
+          <a:p>
+            <a:pPr algn="ctr"/>
+            <a:endParaRPr lang="zh-CN" altLang="en-US"/>
+          </a:p>
+        </p:txBody>
+      </p:sp>
+      <p:sp>
+        <p:nvSpPr>
+          <p:cNvPr id="126" name="矩形 125"/>
+          <p:cNvSpPr/>
+          <p:nvPr/>
+        </p:nvSpPr>
+        <p:spPr>
+          <a:xfrm>
+            <a:off x="38735" y="778510"/>
+            <a:ext cx="368300" cy="171450"/>
+          </a:xfrm>
+          <a:prstGeom prst="rect">
+            <a:avLst/>
+          </a:prstGeom>
+          <a:solidFill>
+            <a:schemeClr val="accent1">
+              <a:lumMod val="60000"/>
+              <a:lumOff val="40000"/>
+            </a:schemeClr>
+          </a:solidFill>
+          <a:ln>
+            <a:noFill/>
+          </a:ln>
+        </p:spPr>
+        <p:style>
+          <a:lnRef idx="2">
+            <a:schemeClr val="accent1">
+              <a:lumMod val="75000"/>
+            </a:schemeClr>
+          </a:lnRef>
+          <a:fillRef idx="1">
+            <a:schemeClr val="accent1"/>
+          </a:fillRef>
+          <a:effectRef idx="0">
+            <a:srgbClr val="FFFFFF"/>
+          </a:effectRef>
+          <a:fontRef idx="minor">
+            <a:schemeClr val="lt1"/>
+          </a:fontRef>
+        </p:style>
+        <p:txBody>
+          <a:bodyPr rtlCol="0" anchor="ctr"/>
+          <a:p>
+            <a:pPr algn="ctr"/>
+            <a:endParaRPr lang="zh-CN" altLang="en-US"/>
+          </a:p>
+        </p:txBody>
+      </p:sp>
+      <p:sp>
+        <p:nvSpPr>
+          <p:cNvPr id="125" name="矩形 124"/>
+          <p:cNvSpPr/>
+          <p:nvPr/>
+        </p:nvSpPr>
+        <p:spPr>
+          <a:xfrm>
+            <a:off x="38735" y="501015"/>
+            <a:ext cx="368300" cy="171450"/>
+          </a:xfrm>
+          <a:prstGeom prst="rect">
+            <a:avLst/>
+          </a:prstGeom>
+          <a:solidFill>
+            <a:schemeClr val="accent1">
+              <a:lumMod val="60000"/>
+              <a:lumOff val="40000"/>
+            </a:schemeClr>
+          </a:solidFill>
+          <a:ln>
+            <a:noFill/>
+          </a:ln>
+        </p:spPr>
+        <p:style>
+          <a:lnRef idx="2">
+            <a:schemeClr val="accent1">
+              <a:lumMod val="75000"/>
+            </a:schemeClr>
+          </a:lnRef>
+          <a:fillRef idx="1">
+            <a:schemeClr val="accent1"/>
+          </a:fillRef>
+          <a:effectRef idx="0">
+            <a:srgbClr val="FFFFFF"/>
+          </a:effectRef>
+          <a:fontRef idx="minor">
+            <a:schemeClr val="lt1"/>
+          </a:fontRef>
+        </p:style>
+        <p:txBody>
+          <a:bodyPr rtlCol="0" anchor="ctr"/>
+          <a:p>
+            <a:pPr algn="ctr"/>
+            <a:endParaRPr lang="zh-CN" altLang="en-US"/>
+          </a:p>
+        </p:txBody>
+      </p:sp>
+      <p:sp>
+        <p:nvSpPr>
+          <p:cNvPr id="124" name="矩形 123"/>
+          <p:cNvSpPr/>
+          <p:nvPr/>
+        </p:nvSpPr>
+        <p:spPr>
+          <a:xfrm>
+            <a:off x="38735" y="217805"/>
+            <a:ext cx="368300" cy="171450"/>
+          </a:xfrm>
+          <a:prstGeom prst="rect">
+            <a:avLst/>
+          </a:prstGeom>
+          <a:solidFill>
+            <a:schemeClr val="accent1">
+              <a:lumMod val="60000"/>
+              <a:lumOff val="40000"/>
+            </a:schemeClr>
+          </a:solidFill>
+          <a:ln>
+            <a:noFill/>
+          </a:ln>
+        </p:spPr>
+        <p:style>
+          <a:lnRef idx="2">
+            <a:schemeClr val="accent1">
+              <a:lumMod val="75000"/>
+            </a:schemeClr>
+          </a:lnRef>
+          <a:fillRef idx="1">
+            <a:schemeClr val="accent1"/>
+          </a:fillRef>
+          <a:effectRef idx="0">
+            <a:srgbClr val="FFFFFF"/>
+          </a:effectRef>
+          <a:fontRef idx="minor">
+            <a:schemeClr val="lt1"/>
+          </a:fontRef>
+        </p:style>
+        <p:txBody>
+          <a:bodyPr rtlCol="0" anchor="ctr"/>
+          <a:p>
+            <a:pPr algn="ctr"/>
+            <a:endParaRPr lang="zh-CN" altLang="en-US"/>
+          </a:p>
+        </p:txBody>
+      </p:sp>
+      <p:sp>
+        <p:nvSpPr>
+          <p:cNvPr id="123" name="矩形 122"/>
+          <p:cNvSpPr/>
+          <p:nvPr/>
+        </p:nvSpPr>
+        <p:spPr>
+          <a:xfrm>
+            <a:off x="724535" y="54610"/>
+            <a:ext cx="260350" cy="171450"/>
+          </a:xfrm>
+          <a:prstGeom prst="rect">
+            <a:avLst/>
+          </a:prstGeom>
+          <a:solidFill>
+            <a:schemeClr val="accent1">
+              <a:lumMod val="60000"/>
+              <a:lumOff val="40000"/>
+            </a:schemeClr>
+          </a:solidFill>
+          <a:ln>
+            <a:noFill/>
+          </a:ln>
+        </p:spPr>
+        <p:style>
+          <a:lnRef idx="2">
+            <a:schemeClr val="accent1">
+              <a:lumMod val="75000"/>
+            </a:schemeClr>
+          </a:lnRef>
+          <a:fillRef idx="1">
+            <a:schemeClr val="accent1"/>
+          </a:fillRef>
+          <a:effectRef idx="0">
+            <a:srgbClr val="FFFFFF"/>
+          </a:effectRef>
+          <a:fontRef idx="minor">
+            <a:schemeClr val="lt1"/>
+          </a:fontRef>
+        </p:style>
+        <p:txBody>
+          <a:bodyPr rtlCol="0" anchor="ctr"/>
+          <a:p>
+            <a:pPr algn="ctr"/>
+            <a:endParaRPr lang="zh-CN" altLang="en-US"/>
           </a:p>
         </p:txBody>
       </p:sp>
       <p:graphicFrame>
         <p:nvGraphicFramePr>
-          <p:cNvPr id="6" name="对象 5">
-            <a:hlinkClick r:id="" action="ppaction://ole?verb="/>
-          </p:cNvPr>
+          <p:cNvPr id="97" name="对象 -2147482608"/>
           <p:cNvGraphicFramePr>
             <a:graphicFrameLocks noChangeAspect="1"/>
           </p:cNvGraphicFramePr>
           <p:nvPr/>
         </p:nvGraphicFramePr>
         <p:xfrm>
-          <a:off x="1750816" y="915498"/>
-          <a:ext cx="98112" cy="183961"/>
+          <a:off x="727930" y="217959"/>
+          <a:ext cx="221615" cy="196850"/>
         </p:xfrm>
         <a:graphic>
           <a:graphicData uri="http://schemas.openxmlformats.org/presentationml/2006/ole">
             <mc:AlternateContent xmlns:mc="http://schemas.openxmlformats.org/markup-compatibility/2006">
               <mc:Choice xmlns:v="urn:schemas-microsoft-com:vml" Requires="v">
-                <p:oleObj spid="_x0000_s1025" name="" r:id="rId1" imgW="101600" imgH="190500" progId="Equation.KSEE3">
+                <p:oleObj spid="_x0000_s98" name="" r:id="rId1" imgW="228600" imgH="203200" progId="DSEquations">
                   <p:embed/>
                 </p:oleObj>
               </mc:Choice>
               <mc:Fallback>
-                <p:oleObj name="" r:id="rId1" imgW="101600" imgH="190500" progId="Equation.KSEE3">
+                <p:oleObj name="" r:id="rId1" imgW="228600" imgH="203200" progId="DSEquations">
                   <p:embed/>
                   <p:pic>
                     <p:nvPicPr>
-                      <p:cNvPr id="0" name="图片 1024"/>
+                      <p:cNvPr id="0" name="图片 3075"/>
                       <p:cNvPicPr/>
                       <p:nvPr/>
                     </p:nvPicPr>
@@ -3157,283 +3692,8 @@
                     </p:blipFill>
                     <p:spPr>
                       <a:xfrm>
-                        <a:off x="1750816" y="915498"/>
-                        <a:ext cx="98112" cy="183961"/>
-                      </a:xfrm>
-                      <a:prstGeom prst="rect">
-                        <a:avLst/>
-                      </a:prstGeom>
-                    </p:spPr>
-                  </p:pic>
-                </p:oleObj>
-              </mc:Fallback>
-            </mc:AlternateContent>
-          </a:graphicData>
-        </a:graphic>
-      </p:graphicFrame>
-      <p:graphicFrame>
-        <p:nvGraphicFramePr>
-          <p:cNvPr id="97" name="对象 -2147482608"/>
-          <p:cNvGraphicFramePr>
-            <a:graphicFrameLocks noChangeAspect="1"/>
-          </p:cNvGraphicFramePr>
-          <p:nvPr/>
-        </p:nvGraphicFramePr>
-        <p:xfrm>
-          <a:off x="346584" y="254467"/>
-          <a:ext cx="355657" cy="196225"/>
-        </p:xfrm>
-        <a:graphic>
-          <a:graphicData uri="http://schemas.openxmlformats.org/presentationml/2006/ole">
-            <mc:AlternateContent xmlns:mc="http://schemas.openxmlformats.org/markup-compatibility/2006">
-              <mc:Choice xmlns:v="urn:schemas-microsoft-com:vml" Requires="v">
-                <p:oleObj spid="_x0000_s98" name="" r:id="rId3" imgW="368300" imgH="203200" progId="DSEquations">
-                  <p:embed/>
-                </p:oleObj>
-              </mc:Choice>
-              <mc:Fallback>
-                <p:oleObj name="" r:id="rId3" imgW="368300" imgH="203200" progId="DSEquations">
-                  <p:embed/>
-                  <p:pic>
-                    <p:nvPicPr>
-                      <p:cNvPr id="0" name="图片 3075"/>
-                      <p:cNvPicPr/>
-                      <p:nvPr/>
-                    </p:nvPicPr>
-                    <p:blipFill>
-                      <a:blip r:embed="rId4"/>
-                      <a:stretch>
-                        <a:fillRect/>
-                      </a:stretch>
-                    </p:blipFill>
-                    <p:spPr>
-                      <a:xfrm>
-                        <a:off x="346584" y="254467"/>
-                        <a:ext cx="355657" cy="196225"/>
-                      </a:xfrm>
-                      <a:prstGeom prst="rect">
-                        <a:avLst/>
-                      </a:prstGeom>
-                      <a:noFill/>
-                      <a:ln w="38100">
-                        <a:noFill/>
-                        <a:miter/>
-                      </a:ln>
-                    </p:spPr>
-                  </p:pic>
-                </p:oleObj>
-              </mc:Fallback>
-            </mc:AlternateContent>
-          </a:graphicData>
-        </a:graphic>
-      </p:graphicFrame>
-      <p:graphicFrame>
-        <p:nvGraphicFramePr>
-          <p:cNvPr id="7" name="对象 -2147482608"/>
-          <p:cNvGraphicFramePr>
-            <a:graphicFrameLocks noChangeAspect="1"/>
-          </p:cNvGraphicFramePr>
-          <p:nvPr/>
-        </p:nvGraphicFramePr>
-        <p:xfrm>
-          <a:off x="346584" y="540219"/>
-          <a:ext cx="355657" cy="196225"/>
-        </p:xfrm>
-        <a:graphic>
-          <a:graphicData uri="http://schemas.openxmlformats.org/presentationml/2006/ole">
-            <mc:AlternateContent xmlns:mc="http://schemas.openxmlformats.org/markup-compatibility/2006">
-              <mc:Choice xmlns:v="urn:schemas-microsoft-com:vml" Requires="v">
-                <p:oleObj spid="_x0000_s8" name="" r:id="rId5" imgW="368300" imgH="203200" progId="DSEquations">
-                  <p:embed/>
-                </p:oleObj>
-              </mc:Choice>
-              <mc:Fallback>
-                <p:oleObj name="" r:id="rId5" imgW="368300" imgH="203200" progId="DSEquations">
-                  <p:embed/>
-                  <p:pic>
-                    <p:nvPicPr>
-                      <p:cNvPr id="0" name="图片 3075"/>
-                      <p:cNvPicPr/>
-                      <p:nvPr/>
-                    </p:nvPicPr>
-                    <p:blipFill>
-                      <a:blip r:embed="rId4"/>
-                      <a:stretch>
-                        <a:fillRect/>
-                      </a:stretch>
-                    </p:blipFill>
-                    <p:spPr>
-                      <a:xfrm>
-                        <a:off x="346584" y="540219"/>
-                        <a:ext cx="355657" cy="196225"/>
-                      </a:xfrm>
-                      <a:prstGeom prst="rect">
-                        <a:avLst/>
-                      </a:prstGeom>
-                      <a:noFill/>
-                      <a:ln w="38100">
-                        <a:noFill/>
-                        <a:miter/>
-                      </a:ln>
-                    </p:spPr>
-                  </p:pic>
-                </p:oleObj>
-              </mc:Fallback>
-            </mc:AlternateContent>
-          </a:graphicData>
-        </a:graphic>
-      </p:graphicFrame>
-      <p:graphicFrame>
-        <p:nvGraphicFramePr>
-          <p:cNvPr id="9" name="对象 -2147482608"/>
-          <p:cNvGraphicFramePr>
-            <a:graphicFrameLocks noChangeAspect="1"/>
-          </p:cNvGraphicFramePr>
-          <p:nvPr/>
-        </p:nvGraphicFramePr>
-        <p:xfrm>
-          <a:off x="346584" y="859084"/>
-          <a:ext cx="355657" cy="196225"/>
-        </p:xfrm>
-        <a:graphic>
-          <a:graphicData uri="http://schemas.openxmlformats.org/presentationml/2006/ole">
-            <mc:AlternateContent xmlns:mc="http://schemas.openxmlformats.org/markup-compatibility/2006">
-              <mc:Choice xmlns:v="urn:schemas-microsoft-com:vml" Requires="v">
-                <p:oleObj spid="_x0000_s10" name="" r:id="rId6" imgW="368300" imgH="203200" progId="DSEquations">
-                  <p:embed/>
-                </p:oleObj>
-              </mc:Choice>
-              <mc:Fallback>
-                <p:oleObj name="" r:id="rId6" imgW="368300" imgH="203200" progId="DSEquations">
-                  <p:embed/>
-                  <p:pic>
-                    <p:nvPicPr>
-                      <p:cNvPr id="0" name="图片 3075"/>
-                      <p:cNvPicPr/>
-                      <p:nvPr/>
-                    </p:nvPicPr>
-                    <p:blipFill>
-                      <a:blip r:embed="rId4"/>
-                      <a:stretch>
-                        <a:fillRect/>
-                      </a:stretch>
-                    </p:blipFill>
-                    <p:spPr>
-                      <a:xfrm>
-                        <a:off x="346584" y="859084"/>
-                        <a:ext cx="355657" cy="196225"/>
-                      </a:xfrm>
-                      <a:prstGeom prst="rect">
-                        <a:avLst/>
-                      </a:prstGeom>
-                      <a:noFill/>
-                      <a:ln w="38100">
-                        <a:noFill/>
-                        <a:miter/>
-                      </a:ln>
-                    </p:spPr>
-                  </p:pic>
-                </p:oleObj>
-              </mc:Fallback>
-            </mc:AlternateContent>
-          </a:graphicData>
-        </a:graphic>
-      </p:graphicFrame>
-      <p:graphicFrame>
-        <p:nvGraphicFramePr>
-          <p:cNvPr id="11" name="对象 -2147482608"/>
-          <p:cNvGraphicFramePr>
-            <a:graphicFrameLocks noChangeAspect="1"/>
-          </p:cNvGraphicFramePr>
-          <p:nvPr/>
-        </p:nvGraphicFramePr>
-        <p:xfrm>
-          <a:off x="346584" y="1177949"/>
-          <a:ext cx="355657" cy="196225"/>
-        </p:xfrm>
-        <a:graphic>
-          <a:graphicData uri="http://schemas.openxmlformats.org/presentationml/2006/ole">
-            <mc:AlternateContent xmlns:mc="http://schemas.openxmlformats.org/markup-compatibility/2006">
-              <mc:Choice xmlns:v="urn:schemas-microsoft-com:vml" Requires="v">
-                <p:oleObj spid="_x0000_s12" name="" r:id="rId7" imgW="368300" imgH="203200" progId="DSEquations">
-                  <p:embed/>
-                </p:oleObj>
-              </mc:Choice>
-              <mc:Fallback>
-                <p:oleObj name="" r:id="rId7" imgW="368300" imgH="203200" progId="DSEquations">
-                  <p:embed/>
-                  <p:pic>
-                    <p:nvPicPr>
-                      <p:cNvPr id="0" name="图片 3075"/>
-                      <p:cNvPicPr/>
-                      <p:nvPr/>
-                    </p:nvPicPr>
-                    <p:blipFill>
-                      <a:blip r:embed="rId4"/>
-                      <a:stretch>
-                        <a:fillRect/>
-                      </a:stretch>
-                    </p:blipFill>
-                    <p:spPr>
-                      <a:xfrm>
-                        <a:off x="346584" y="1177949"/>
-                        <a:ext cx="355657" cy="196225"/>
-                      </a:xfrm>
-                      <a:prstGeom prst="rect">
-                        <a:avLst/>
-                      </a:prstGeom>
-                      <a:noFill/>
-                      <a:ln w="38100">
-                        <a:noFill/>
-                        <a:miter/>
-                      </a:ln>
-                    </p:spPr>
-                  </p:pic>
-                </p:oleObj>
-              </mc:Fallback>
-            </mc:AlternateContent>
-          </a:graphicData>
-        </a:graphic>
-      </p:graphicFrame>
-      <p:graphicFrame>
-        <p:nvGraphicFramePr>
-          <p:cNvPr id="13" name="对象 -2147482608"/>
-          <p:cNvGraphicFramePr>
-            <a:graphicFrameLocks noChangeAspect="1"/>
-          </p:cNvGraphicFramePr>
-          <p:nvPr/>
-        </p:nvGraphicFramePr>
-        <p:xfrm>
-          <a:off x="346584" y="1530540"/>
-          <a:ext cx="355657" cy="196225"/>
-        </p:xfrm>
-        <a:graphic>
-          <a:graphicData uri="http://schemas.openxmlformats.org/presentationml/2006/ole">
-            <mc:AlternateContent xmlns:mc="http://schemas.openxmlformats.org/markup-compatibility/2006">
-              <mc:Choice xmlns:v="urn:schemas-microsoft-com:vml" Requires="v">
-                <p:oleObj spid="_x0000_s14" name="" r:id="rId8" imgW="368300" imgH="203200" progId="DSEquations">
-                  <p:embed/>
-                </p:oleObj>
-              </mc:Choice>
-              <mc:Fallback>
-                <p:oleObj name="" r:id="rId8" imgW="368300" imgH="203200" progId="DSEquations">
-                  <p:embed/>
-                  <p:pic>
-                    <p:nvPicPr>
-                      <p:cNvPr id="0" name="图片 3075"/>
-                      <p:cNvPicPr/>
-                      <p:nvPr/>
-                    </p:nvPicPr>
-                    <p:blipFill>
-                      <a:blip r:embed="rId4"/>
-                      <a:stretch>
-                        <a:fillRect/>
-                      </a:stretch>
-                    </p:blipFill>
-                    <p:spPr>
-                      <a:xfrm>
-                        <a:off x="346584" y="1530540"/>
-                        <a:ext cx="355657" cy="196225"/>
+                        <a:off x="727930" y="217959"/>
+                        <a:ext cx="221615" cy="196850"/>
                       </a:xfrm>
                       <a:prstGeom prst="rect">
                         <a:avLst/>
@@ -3460,19 +3720,19 @@
           <p:nvPr/>
         </p:nvGraphicFramePr>
         <p:xfrm>
-          <a:off x="725509" y="223813"/>
-          <a:ext cx="355639" cy="196214"/>
+          <a:off x="62589" y="217780"/>
+          <a:ext cx="344170" cy="184150"/>
         </p:xfrm>
         <a:graphic>
           <a:graphicData uri="http://schemas.openxmlformats.org/presentationml/2006/ole">
             <mc:AlternateContent xmlns:mc="http://schemas.openxmlformats.org/markup-compatibility/2006">
               <mc:Choice xmlns:v="urn:schemas-microsoft-com:vml" Requires="v">
-                <p:oleObj spid="_x0000_s16" name="" r:id="rId9" imgW="368300" imgH="203200" progId="DSEquations">
+                <p:oleObj spid="_x0000_s16" name="" r:id="rId3" imgW="355600" imgH="190500" progId="DSEquations">
                   <p:embed/>
                 </p:oleObj>
               </mc:Choice>
               <mc:Fallback>
-                <p:oleObj name="" r:id="rId9" imgW="368300" imgH="203200" progId="DSEquations">
+                <p:oleObj name="" r:id="rId3" imgW="355600" imgH="190500" progId="DSEquations">
                   <p:embed/>
                   <p:pic>
                     <p:nvPicPr>
@@ -3488,8 +3748,152 @@
                     </p:blipFill>
                     <p:spPr>
                       <a:xfrm>
-                        <a:off x="725509" y="223813"/>
-                        <a:ext cx="355639" cy="196214"/>
+                        <a:off x="62589" y="217780"/>
+                        <a:ext cx="344170" cy="184150"/>
+                      </a:xfrm>
+                      <a:prstGeom prst="rect">
+                        <a:avLst/>
+                      </a:prstGeom>
+                      <a:noFill/>
+                      <a:ln w="38100">
+                        <a:noFill/>
+                        <a:miter/>
+                      </a:ln>
+                    </p:spPr>
+                  </p:pic>
+                </p:oleObj>
+              </mc:Fallback>
+            </mc:AlternateContent>
+          </a:graphicData>
+        </a:graphic>
+      </p:graphicFrame>
+      <p:sp>
+        <p:nvSpPr>
+          <p:cNvPr id="5" name="右箭头 4"/>
+          <p:cNvSpPr/>
+          <p:nvPr/>
+        </p:nvSpPr>
+        <p:spPr>
+          <a:xfrm>
+            <a:off x="419735" y="272415"/>
+            <a:ext cx="241935" cy="75565"/>
+          </a:xfrm>
+          <a:prstGeom prst="rightArrow">
+            <a:avLst/>
+          </a:prstGeom>
+          <a:solidFill>
+            <a:schemeClr val="tx1"/>
+          </a:solidFill>
+        </p:spPr>
+        <p:style>
+          <a:lnRef idx="0">
+            <a:srgbClr val="FFFFFF"/>
+          </a:lnRef>
+          <a:fillRef idx="1">
+            <a:schemeClr val="accent1"/>
+          </a:fillRef>
+          <a:effectRef idx="0">
+            <a:srgbClr val="FFFFFF"/>
+          </a:effectRef>
+          <a:fontRef idx="minor">
+            <a:schemeClr val="lt1"/>
+          </a:fontRef>
+        </p:style>
+        <p:txBody>
+          <a:bodyPr rtlCol="0" anchor="ctr"/>
+          <a:p>
+            <a:pPr algn="ctr"/>
+            <a:endParaRPr lang="zh-CN" altLang="en-US"/>
+          </a:p>
+        </p:txBody>
+      </p:sp>
+      <p:sp>
+        <p:nvSpPr>
+          <p:cNvPr id="21" name="文本框 20"/>
+          <p:cNvSpPr txBox="1"/>
+          <p:nvPr/>
+        </p:nvSpPr>
+        <p:spPr>
+          <a:xfrm>
+            <a:off x="675640" y="20638"/>
+            <a:ext cx="467360" cy="245110"/>
+          </a:xfrm>
+          <a:prstGeom prst="rect">
+            <a:avLst/>
+          </a:prstGeom>
+          <a:noFill/>
+          <a:ln>
+            <a:noFill/>
+          </a:ln>
+        </p:spPr>
+        <p:txBody>
+          <a:bodyPr wrap="square" rtlCol="0">
+            <a:spAutoFit/>
+          </a:bodyPr>
+          <a:p>
+            <a:r>
+              <a:rPr lang="en-US" altLang="zh-CN" sz="1000">
+                <a:latin typeface="Times New Roman" panose="02020603050405020304" charset="0"/>
+                <a:ea typeface="宋体" panose="02010600030101010101" pitchFamily="2" charset="-122"/>
+                <a:cs typeface="Times New Roman" panose="02020603050405020304" charset="0"/>
+              </a:rPr>
+              <a:t>1</a:t>
+            </a:r>
+            <a:r>
+              <a:rPr lang="zh-CN" altLang="en-US" sz="1000">
+                <a:latin typeface="Times New Roman" panose="02020603050405020304" charset="0"/>
+                <a:ea typeface="宋体" panose="02010600030101010101" pitchFamily="2" charset="-122"/>
+                <a:cs typeface="Times New Roman" panose="02020603050405020304" charset="0"/>
+              </a:rPr>
+              <a:t>阶</a:t>
+            </a:r>
+            <a:endParaRPr lang="zh-CN" altLang="en-US" sz="1000">
+              <a:latin typeface="Times New Roman" panose="02020603050405020304" charset="0"/>
+              <a:ea typeface="宋体" panose="02010600030101010101" pitchFamily="2" charset="-122"/>
+              <a:cs typeface="Times New Roman" panose="02020603050405020304" charset="0"/>
+            </a:endParaRPr>
+          </a:p>
+        </p:txBody>
+      </p:sp>
+      <p:graphicFrame>
+        <p:nvGraphicFramePr>
+          <p:cNvPr id="22" name="对象 -2147482608"/>
+          <p:cNvGraphicFramePr>
+            <a:graphicFrameLocks noChangeAspect="1"/>
+          </p:cNvGraphicFramePr>
+          <p:nvPr/>
+        </p:nvGraphicFramePr>
+        <p:xfrm>
+          <a:off x="733963" y="495455"/>
+          <a:ext cx="209550" cy="196850"/>
+        </p:xfrm>
+        <a:graphic>
+          <a:graphicData uri="http://schemas.openxmlformats.org/presentationml/2006/ole">
+            <mc:AlternateContent xmlns:mc="http://schemas.openxmlformats.org/markup-compatibility/2006">
+              <mc:Choice xmlns:v="urn:schemas-microsoft-com:vml" Requires="v">
+                <p:oleObj spid="_x0000_s23" name="" r:id="rId5" imgW="215900" imgH="203200" progId="DSEquations">
+                  <p:embed/>
+                </p:oleObj>
+              </mc:Choice>
+              <mc:Fallback>
+                <p:oleObj name="" r:id="rId5" imgW="215900" imgH="203200" progId="DSEquations">
+                  <p:embed/>
+                  <p:pic>
+                    <p:nvPicPr>
+                      <p:cNvPr id="0" name="图片 3075"/>
+                      <p:cNvPicPr/>
+                      <p:nvPr/>
+                    </p:nvPicPr>
+                    <p:blipFill>
+                      <a:blip r:embed="rId6"/>
+                      <a:stretch>
+                        <a:fillRect/>
+                      </a:stretch>
+                    </p:blipFill>
+                    <p:spPr>
+                      <a:xfrm>
+                        <a:off x="733963" y="495455"/>
+                        <a:ext cx="209550" cy="196850"/>
                       </a:xfrm>
                       <a:prstGeom prst="rect">
                         <a:avLst/>
@@ -3509,26 +3913,26 @@
       </p:graphicFrame>
       <p:graphicFrame>
         <p:nvGraphicFramePr>
-          <p:cNvPr id="17" name="对象 -2147482608"/>
+          <p:cNvPr id="24" name="对象 -2147482608"/>
           <p:cNvGraphicFramePr>
             <a:graphicFrameLocks noChangeAspect="1"/>
           </p:cNvGraphicFramePr>
           <p:nvPr/>
         </p:nvGraphicFramePr>
         <p:xfrm>
-          <a:off x="751840" y="516890"/>
-          <a:ext cx="368300" cy="203200"/>
+          <a:off x="62589" y="495275"/>
+          <a:ext cx="344170" cy="184150"/>
         </p:xfrm>
         <a:graphic>
           <a:graphicData uri="http://schemas.openxmlformats.org/presentationml/2006/ole">
             <mc:AlternateContent xmlns:mc="http://schemas.openxmlformats.org/markup-compatibility/2006">
               <mc:Choice xmlns:v="urn:schemas-microsoft-com:vml" Requires="v">
-                <p:oleObj spid="_x0000_s18" name="" r:id="rId10" imgW="368300" imgH="203200" progId="DSEquations">
+                <p:oleObj spid="_x0000_s25" name="" r:id="rId7" imgW="355600" imgH="190500" progId="DSEquations">
                   <p:embed/>
                 </p:oleObj>
               </mc:Choice>
               <mc:Fallback>
-                <p:oleObj name="" r:id="rId10" imgW="368300" imgH="203200" progId="DSEquations">
+                <p:oleObj name="" r:id="rId7" imgW="355600" imgH="190500" progId="DSEquations">
                   <p:embed/>
                   <p:pic>
                     <p:nvPicPr>
@@ -3537,15 +3941,3264 @@
                       <p:nvPr/>
                     </p:nvPicPr>
                     <p:blipFill>
-                      <a:blip r:embed="rId4"/>
+                      <a:blip r:embed="rId8"/>
                       <a:stretch>
                         <a:fillRect/>
                       </a:stretch>
                     </p:blipFill>
                     <p:spPr>
                       <a:xfrm>
-                        <a:off x="751840" y="516890"/>
-                        <a:ext cx="368300" cy="203200"/>
+                        <a:off x="62589" y="495275"/>
+                        <a:ext cx="344170" cy="184150"/>
+                      </a:xfrm>
+                      <a:prstGeom prst="rect">
+                        <a:avLst/>
+                      </a:prstGeom>
+                      <a:noFill/>
+                      <a:ln w="38100">
+                        <a:noFill/>
+                        <a:miter/>
+                      </a:ln>
+                    </p:spPr>
+                  </p:pic>
+                </p:oleObj>
+              </mc:Fallback>
+            </mc:AlternateContent>
+          </a:graphicData>
+        </a:graphic>
+      </p:graphicFrame>
+      <p:sp>
+        <p:nvSpPr>
+          <p:cNvPr id="26" name="右箭头 25"/>
+          <p:cNvSpPr/>
+          <p:nvPr/>
+        </p:nvSpPr>
+        <p:spPr>
+          <a:xfrm>
+            <a:off x="419735" y="549910"/>
+            <a:ext cx="241935" cy="75565"/>
+          </a:xfrm>
+          <a:prstGeom prst="rightArrow">
+            <a:avLst/>
+          </a:prstGeom>
+          <a:solidFill>
+            <a:schemeClr val="tx1"/>
+          </a:solidFill>
+        </p:spPr>
+        <p:style>
+          <a:lnRef idx="0">
+            <a:srgbClr val="FFFFFF"/>
+          </a:lnRef>
+          <a:fillRef idx="1">
+            <a:schemeClr val="accent1"/>
+          </a:fillRef>
+          <a:effectRef idx="0">
+            <a:srgbClr val="FFFFFF"/>
+          </a:effectRef>
+          <a:fontRef idx="minor">
+            <a:schemeClr val="lt1"/>
+          </a:fontRef>
+        </p:style>
+        <p:txBody>
+          <a:bodyPr rtlCol="0" anchor="ctr"/>
+          <a:p>
+            <a:pPr algn="ctr"/>
+            <a:endParaRPr lang="zh-CN" altLang="en-US"/>
+          </a:p>
+        </p:txBody>
+      </p:sp>
+      <p:cxnSp>
+        <p:nvCxnSpPr>
+          <p:cNvPr id="29" name="直接连接符 28"/>
+          <p:cNvCxnSpPr>
+            <a:stCxn id="31" idx="1"/>
+            <a:endCxn id="97" idx="3"/>
+          </p:cNvCxnSpPr>
+          <p:nvPr/>
+        </p:nvCxnSpPr>
+        <p:spPr>
+          <a:xfrm flipH="1" flipV="1">
+            <a:off x="949325" y="316230"/>
+            <a:ext cx="231775" cy="153670"/>
+          </a:xfrm>
+          <a:prstGeom prst="line">
+            <a:avLst/>
+          </a:prstGeom>
+          <a:ln>
+            <a:headEnd type="triangle" w="sm" len="sm"/>
+          </a:ln>
+        </p:spPr>
+        <p:style>
+          <a:lnRef idx="2">
+            <a:schemeClr val="accent1"/>
+          </a:lnRef>
+          <a:fillRef idx="0">
+            <a:srgbClr val="FFFFFF"/>
+          </a:fillRef>
+          <a:effectRef idx="0">
+            <a:srgbClr val="FFFFFF"/>
+          </a:effectRef>
+          <a:fontRef idx="minor">
+            <a:schemeClr val="tx1"/>
+          </a:fontRef>
+        </p:style>
+      </p:cxnSp>
+      <p:cxnSp>
+        <p:nvCxnSpPr>
+          <p:cNvPr id="30" name="直接连接符 29"/>
+          <p:cNvCxnSpPr>
+            <a:stCxn id="31" idx="1"/>
+            <a:endCxn id="22" idx="3"/>
+          </p:cNvCxnSpPr>
+          <p:nvPr/>
+        </p:nvCxnSpPr>
+        <p:spPr>
+          <a:xfrm flipH="1">
+            <a:off x="943610" y="469900"/>
+            <a:ext cx="237490" cy="123825"/>
+          </a:xfrm>
+          <a:prstGeom prst="line">
+            <a:avLst/>
+          </a:prstGeom>
+          <a:ln>
+            <a:headEnd type="triangle" w="sm" len="sm"/>
+          </a:ln>
+        </p:spPr>
+        <p:style>
+          <a:lnRef idx="2">
+            <a:schemeClr val="accent1"/>
+          </a:lnRef>
+          <a:fillRef idx="0">
+            <a:srgbClr val="FFFFFF"/>
+          </a:fillRef>
+          <a:effectRef idx="0">
+            <a:srgbClr val="FFFFFF"/>
+          </a:effectRef>
+          <a:fontRef idx="minor">
+            <a:schemeClr val="tx1"/>
+          </a:fontRef>
+        </p:style>
+      </p:cxnSp>
+      <p:graphicFrame>
+        <p:nvGraphicFramePr>
+          <p:cNvPr id="31" name="对象 -2147482608"/>
+          <p:cNvGraphicFramePr>
+            <a:graphicFrameLocks noChangeAspect="1"/>
+          </p:cNvGraphicFramePr>
+          <p:nvPr/>
+        </p:nvGraphicFramePr>
+        <p:xfrm>
+          <a:off x="1181003" y="371629"/>
+          <a:ext cx="246380" cy="196850"/>
+        </p:xfrm>
+        <a:graphic>
+          <a:graphicData uri="http://schemas.openxmlformats.org/presentationml/2006/ole">
+            <mc:AlternateContent xmlns:mc="http://schemas.openxmlformats.org/markup-compatibility/2006">
+              <mc:Choice xmlns:v="urn:schemas-microsoft-com:vml" Requires="v">
+                <p:oleObj spid="_x0000_s32" name="" r:id="rId9" imgW="254000" imgH="203200" progId="DSEquations">
+                  <p:embed/>
+                </p:oleObj>
+              </mc:Choice>
+              <mc:Fallback>
+                <p:oleObj name="" r:id="rId9" imgW="254000" imgH="203200" progId="DSEquations">
+                  <p:embed/>
+                  <p:pic>
+                    <p:nvPicPr>
+                      <p:cNvPr id="0" name="图片 3075"/>
+                      <p:cNvPicPr/>
+                      <p:nvPr/>
+                    </p:nvPicPr>
+                    <p:blipFill>
+                      <a:blip r:embed="rId10"/>
+                      <a:stretch>
+                        <a:fillRect/>
+                      </a:stretch>
+                    </p:blipFill>
+                    <p:spPr>
+                      <a:xfrm>
+                        <a:off x="1181003" y="371629"/>
+                        <a:ext cx="246380" cy="196850"/>
+                      </a:xfrm>
+                      <a:prstGeom prst="rect">
+                        <a:avLst/>
+                      </a:prstGeom>
+                      <a:noFill/>
+                      <a:ln w="38100">
+                        <a:noFill/>
+                        <a:miter/>
+                      </a:ln>
+                    </p:spPr>
+                  </p:pic>
+                </p:oleObj>
+              </mc:Fallback>
+            </mc:AlternateContent>
+          </a:graphicData>
+        </a:graphic>
+      </p:graphicFrame>
+      <p:sp>
+        <p:nvSpPr>
+          <p:cNvPr id="33" name="文本框 32"/>
+          <p:cNvSpPr txBox="1"/>
+          <p:nvPr/>
+        </p:nvSpPr>
+        <p:spPr>
+          <a:xfrm>
+            <a:off x="1123315" y="20638"/>
+            <a:ext cx="467360" cy="245110"/>
+          </a:xfrm>
+          <a:prstGeom prst="rect">
+            <a:avLst/>
+          </a:prstGeom>
+          <a:noFill/>
+        </p:spPr>
+        <p:txBody>
+          <a:bodyPr wrap="square" rtlCol="0">
+            <a:spAutoFit/>
+          </a:bodyPr>
+          <a:p>
+            <a:r>
+              <a:rPr lang="en-US" altLang="zh-CN" sz="1000">
+                <a:latin typeface="Times New Roman" panose="02020603050405020304" charset="0"/>
+                <a:ea typeface="宋体" panose="02010600030101010101" pitchFamily="2" charset="-122"/>
+                <a:cs typeface="Times New Roman" panose="02020603050405020304" charset="0"/>
+              </a:rPr>
+              <a:t>2</a:t>
+            </a:r>
+            <a:r>
+              <a:rPr lang="zh-CN" altLang="en-US" sz="1000">
+                <a:latin typeface="Times New Roman" panose="02020603050405020304" charset="0"/>
+                <a:ea typeface="宋体" panose="02010600030101010101" pitchFamily="2" charset="-122"/>
+                <a:cs typeface="Times New Roman" panose="02020603050405020304" charset="0"/>
+              </a:rPr>
+              <a:t>阶</a:t>
+            </a:r>
+            <a:endParaRPr lang="zh-CN" altLang="en-US" sz="1000">
+              <a:latin typeface="Times New Roman" panose="02020603050405020304" charset="0"/>
+              <a:ea typeface="宋体" panose="02010600030101010101" pitchFamily="2" charset="-122"/>
+              <a:cs typeface="Times New Roman" panose="02020603050405020304" charset="0"/>
+            </a:endParaRPr>
+          </a:p>
+        </p:txBody>
+      </p:sp>
+      <p:graphicFrame>
+        <p:nvGraphicFramePr>
+          <p:cNvPr id="34" name="对象 -2147482608"/>
+          <p:cNvGraphicFramePr>
+            <a:graphicFrameLocks noChangeAspect="1"/>
+          </p:cNvGraphicFramePr>
+          <p:nvPr/>
+        </p:nvGraphicFramePr>
+        <p:xfrm>
+          <a:off x="721580" y="772950"/>
+          <a:ext cx="234315" cy="196850"/>
+        </p:xfrm>
+        <a:graphic>
+          <a:graphicData uri="http://schemas.openxmlformats.org/presentationml/2006/ole">
+            <mc:AlternateContent xmlns:mc="http://schemas.openxmlformats.org/markup-compatibility/2006">
+              <mc:Choice xmlns:v="urn:schemas-microsoft-com:vml" Requires="v">
+                <p:oleObj spid="_x0000_s35" name="" r:id="rId11" imgW="241300" imgH="203200" progId="DSEquations">
+                  <p:embed/>
+                </p:oleObj>
+              </mc:Choice>
+              <mc:Fallback>
+                <p:oleObj name="" r:id="rId11" imgW="241300" imgH="203200" progId="DSEquations">
+                  <p:embed/>
+                  <p:pic>
+                    <p:nvPicPr>
+                      <p:cNvPr id="0" name="图片 3075"/>
+                      <p:cNvPicPr/>
+                      <p:nvPr/>
+                    </p:nvPicPr>
+                    <p:blipFill>
+                      <a:blip r:embed="rId12"/>
+                      <a:stretch>
+                        <a:fillRect/>
+                      </a:stretch>
+                    </p:blipFill>
+                    <p:spPr>
+                      <a:xfrm>
+                        <a:off x="721580" y="772950"/>
+                        <a:ext cx="234315" cy="196850"/>
+                      </a:xfrm>
+                      <a:prstGeom prst="rect">
+                        <a:avLst/>
+                      </a:prstGeom>
+                      <a:noFill/>
+                      <a:ln w="38100">
+                        <a:noFill/>
+                        <a:miter/>
+                      </a:ln>
+                    </p:spPr>
+                  </p:pic>
+                </p:oleObj>
+              </mc:Fallback>
+            </mc:AlternateContent>
+          </a:graphicData>
+        </a:graphic>
+      </p:graphicFrame>
+      <p:graphicFrame>
+        <p:nvGraphicFramePr>
+          <p:cNvPr id="36" name="对象 -2147482608"/>
+          <p:cNvGraphicFramePr>
+            <a:graphicFrameLocks noChangeAspect="1"/>
+          </p:cNvGraphicFramePr>
+          <p:nvPr/>
+        </p:nvGraphicFramePr>
+        <p:xfrm>
+          <a:off x="62589" y="772770"/>
+          <a:ext cx="356870" cy="184150"/>
+        </p:xfrm>
+        <a:graphic>
+          <a:graphicData uri="http://schemas.openxmlformats.org/presentationml/2006/ole">
+            <mc:AlternateContent xmlns:mc="http://schemas.openxmlformats.org/markup-compatibility/2006">
+              <mc:Choice xmlns:v="urn:schemas-microsoft-com:vml" Requires="v">
+                <p:oleObj spid="_x0000_s37" name="" r:id="rId13" imgW="368300" imgH="190500" progId="DSEquations">
+                  <p:embed/>
+                </p:oleObj>
+              </mc:Choice>
+              <mc:Fallback>
+                <p:oleObj name="" r:id="rId13" imgW="368300" imgH="190500" progId="DSEquations">
+                  <p:embed/>
+                  <p:pic>
+                    <p:nvPicPr>
+                      <p:cNvPr id="0" name="图片 3075"/>
+                      <p:cNvPicPr/>
+                      <p:nvPr/>
+                    </p:nvPicPr>
+                    <p:blipFill>
+                      <a:blip r:embed="rId14"/>
+                      <a:stretch>
+                        <a:fillRect/>
+                      </a:stretch>
+                    </p:blipFill>
+                    <p:spPr>
+                      <a:xfrm>
+                        <a:off x="62589" y="772770"/>
+                        <a:ext cx="356870" cy="184150"/>
+                      </a:xfrm>
+                      <a:prstGeom prst="rect">
+                        <a:avLst/>
+                      </a:prstGeom>
+                      <a:noFill/>
+                      <a:ln w="38100">
+                        <a:noFill/>
+                        <a:miter/>
+                      </a:ln>
+                    </p:spPr>
+                  </p:pic>
+                </p:oleObj>
+              </mc:Fallback>
+            </mc:AlternateContent>
+          </a:graphicData>
+        </a:graphic>
+      </p:graphicFrame>
+      <p:sp>
+        <p:nvSpPr>
+          <p:cNvPr id="38" name="右箭头 37"/>
+          <p:cNvSpPr/>
+          <p:nvPr/>
+        </p:nvSpPr>
+        <p:spPr>
+          <a:xfrm>
+            <a:off x="419735" y="827405"/>
+            <a:ext cx="241935" cy="75565"/>
+          </a:xfrm>
+          <a:prstGeom prst="rightArrow">
+            <a:avLst/>
+          </a:prstGeom>
+          <a:solidFill>
+            <a:schemeClr val="tx1"/>
+          </a:solidFill>
+        </p:spPr>
+        <p:style>
+          <a:lnRef idx="0">
+            <a:srgbClr val="FFFFFF"/>
+          </a:lnRef>
+          <a:fillRef idx="1">
+            <a:schemeClr val="accent1"/>
+          </a:fillRef>
+          <a:effectRef idx="0">
+            <a:srgbClr val="FFFFFF"/>
+          </a:effectRef>
+          <a:fontRef idx="minor">
+            <a:schemeClr val="lt1"/>
+          </a:fontRef>
+        </p:style>
+        <p:txBody>
+          <a:bodyPr rtlCol="0" anchor="ctr"/>
+          <a:p>
+            <a:pPr algn="ctr"/>
+            <a:endParaRPr lang="zh-CN" altLang="en-US"/>
+          </a:p>
+        </p:txBody>
+      </p:sp>
+      <p:graphicFrame>
+        <p:nvGraphicFramePr>
+          <p:cNvPr id="39" name="对象 -2147482608"/>
+          <p:cNvGraphicFramePr>
+            <a:graphicFrameLocks noChangeAspect="1"/>
+          </p:cNvGraphicFramePr>
+          <p:nvPr/>
+        </p:nvGraphicFramePr>
+        <p:xfrm>
+          <a:off x="727613" y="1050445"/>
+          <a:ext cx="222250" cy="196850"/>
+        </p:xfrm>
+        <a:graphic>
+          <a:graphicData uri="http://schemas.openxmlformats.org/presentationml/2006/ole">
+            <mc:AlternateContent xmlns:mc="http://schemas.openxmlformats.org/markup-compatibility/2006">
+              <mc:Choice xmlns:v="urn:schemas-microsoft-com:vml" Requires="v">
+                <p:oleObj spid="_x0000_s40" name="" r:id="rId15" imgW="228600" imgH="203200" progId="DSEquations">
+                  <p:embed/>
+                </p:oleObj>
+              </mc:Choice>
+              <mc:Fallback>
+                <p:oleObj name="" r:id="rId15" imgW="228600" imgH="203200" progId="DSEquations">
+                  <p:embed/>
+                  <p:pic>
+                    <p:nvPicPr>
+                      <p:cNvPr id="0" name="图片 3075"/>
+                      <p:cNvPicPr/>
+                      <p:nvPr/>
+                    </p:nvPicPr>
+                    <p:blipFill>
+                      <a:blip r:embed="rId16"/>
+                      <a:stretch>
+                        <a:fillRect/>
+                      </a:stretch>
+                    </p:blipFill>
+                    <p:spPr>
+                      <a:xfrm>
+                        <a:off x="727613" y="1050445"/>
+                        <a:ext cx="222250" cy="196850"/>
+                      </a:xfrm>
+                      <a:prstGeom prst="rect">
+                        <a:avLst/>
+                      </a:prstGeom>
+                      <a:noFill/>
+                      <a:ln w="38100">
+                        <a:noFill/>
+                        <a:miter/>
+                      </a:ln>
+                    </p:spPr>
+                  </p:pic>
+                </p:oleObj>
+              </mc:Fallback>
+            </mc:AlternateContent>
+          </a:graphicData>
+        </a:graphic>
+      </p:graphicFrame>
+      <p:graphicFrame>
+        <p:nvGraphicFramePr>
+          <p:cNvPr id="41" name="对象 -2147482608"/>
+          <p:cNvGraphicFramePr>
+            <a:graphicFrameLocks noChangeAspect="1"/>
+          </p:cNvGraphicFramePr>
+          <p:nvPr/>
+        </p:nvGraphicFramePr>
+        <p:xfrm>
+          <a:off x="62589" y="1050265"/>
+          <a:ext cx="356870" cy="184150"/>
+        </p:xfrm>
+        <a:graphic>
+          <a:graphicData uri="http://schemas.openxmlformats.org/presentationml/2006/ole">
+            <mc:AlternateContent xmlns:mc="http://schemas.openxmlformats.org/markup-compatibility/2006">
+              <mc:Choice xmlns:v="urn:schemas-microsoft-com:vml" Requires="v">
+                <p:oleObj spid="_x0000_s42" name="" r:id="rId17" imgW="368300" imgH="190500" progId="DSEquations">
+                  <p:embed/>
+                </p:oleObj>
+              </mc:Choice>
+              <mc:Fallback>
+                <p:oleObj name="" r:id="rId17" imgW="368300" imgH="190500" progId="DSEquations">
+                  <p:embed/>
+                  <p:pic>
+                    <p:nvPicPr>
+                      <p:cNvPr id="0" name="图片 3075"/>
+                      <p:cNvPicPr/>
+                      <p:nvPr/>
+                    </p:nvPicPr>
+                    <p:blipFill>
+                      <a:blip r:embed="rId18"/>
+                      <a:stretch>
+                        <a:fillRect/>
+                      </a:stretch>
+                    </p:blipFill>
+                    <p:spPr>
+                      <a:xfrm>
+                        <a:off x="62589" y="1050265"/>
+                        <a:ext cx="356870" cy="184150"/>
+                      </a:xfrm>
+                      <a:prstGeom prst="rect">
+                        <a:avLst/>
+                      </a:prstGeom>
+                      <a:noFill/>
+                      <a:ln w="38100">
+                        <a:noFill/>
+                        <a:miter/>
+                      </a:ln>
+                    </p:spPr>
+                  </p:pic>
+                </p:oleObj>
+              </mc:Fallback>
+            </mc:AlternateContent>
+          </a:graphicData>
+        </a:graphic>
+      </p:graphicFrame>
+      <p:sp>
+        <p:nvSpPr>
+          <p:cNvPr id="43" name="右箭头 42"/>
+          <p:cNvSpPr/>
+          <p:nvPr/>
+        </p:nvSpPr>
+        <p:spPr>
+          <a:xfrm>
+            <a:off x="419735" y="1104900"/>
+            <a:ext cx="241935" cy="75565"/>
+          </a:xfrm>
+          <a:prstGeom prst="rightArrow">
+            <a:avLst/>
+          </a:prstGeom>
+          <a:solidFill>
+            <a:schemeClr val="tx1"/>
+          </a:solidFill>
+        </p:spPr>
+        <p:style>
+          <a:lnRef idx="0">
+            <a:srgbClr val="FFFFFF"/>
+          </a:lnRef>
+          <a:fillRef idx="1">
+            <a:schemeClr val="accent1"/>
+          </a:fillRef>
+          <a:effectRef idx="0">
+            <a:srgbClr val="FFFFFF"/>
+          </a:effectRef>
+          <a:fontRef idx="minor">
+            <a:schemeClr val="lt1"/>
+          </a:fontRef>
+        </p:style>
+        <p:txBody>
+          <a:bodyPr rtlCol="0" anchor="ctr"/>
+          <a:p>
+            <a:pPr algn="ctr"/>
+            <a:endParaRPr lang="zh-CN" altLang="en-US"/>
+          </a:p>
+        </p:txBody>
+      </p:sp>
+      <p:cxnSp>
+        <p:nvCxnSpPr>
+          <p:cNvPr id="44" name="直接连接符 43"/>
+          <p:cNvCxnSpPr>
+            <a:stCxn id="46" idx="1"/>
+            <a:endCxn id="34" idx="3"/>
+          </p:cNvCxnSpPr>
+          <p:nvPr/>
+        </p:nvCxnSpPr>
+        <p:spPr>
+          <a:xfrm flipH="1" flipV="1">
+            <a:off x="955675" y="871220"/>
+            <a:ext cx="228600" cy="143510"/>
+          </a:xfrm>
+          <a:prstGeom prst="line">
+            <a:avLst/>
+          </a:prstGeom>
+          <a:ln>
+            <a:headEnd type="triangle" w="sm" len="sm"/>
+          </a:ln>
+        </p:spPr>
+        <p:style>
+          <a:lnRef idx="2">
+            <a:schemeClr val="accent1"/>
+          </a:lnRef>
+          <a:fillRef idx="0">
+            <a:srgbClr val="FFFFFF"/>
+          </a:fillRef>
+          <a:effectRef idx="0">
+            <a:srgbClr val="FFFFFF"/>
+          </a:effectRef>
+          <a:fontRef idx="minor">
+            <a:schemeClr val="tx1"/>
+          </a:fontRef>
+        </p:style>
+      </p:cxnSp>
+      <p:cxnSp>
+        <p:nvCxnSpPr>
+          <p:cNvPr id="45" name="直接连接符 44"/>
+          <p:cNvCxnSpPr>
+            <a:stCxn id="46" idx="1"/>
+            <a:endCxn id="39" idx="3"/>
+          </p:cNvCxnSpPr>
+          <p:nvPr/>
+        </p:nvCxnSpPr>
+        <p:spPr>
+          <a:xfrm flipH="1">
+            <a:off x="949960" y="1014730"/>
+            <a:ext cx="234315" cy="133985"/>
+          </a:xfrm>
+          <a:prstGeom prst="line">
+            <a:avLst/>
+          </a:prstGeom>
+          <a:ln>
+            <a:headEnd type="triangle" w="sm" len="sm"/>
+          </a:ln>
+        </p:spPr>
+        <p:style>
+          <a:lnRef idx="2">
+            <a:schemeClr val="accent1"/>
+          </a:lnRef>
+          <a:fillRef idx="0">
+            <a:srgbClr val="FFFFFF"/>
+          </a:fillRef>
+          <a:effectRef idx="0">
+            <a:srgbClr val="FFFFFF"/>
+          </a:effectRef>
+          <a:fontRef idx="minor">
+            <a:schemeClr val="tx1"/>
+          </a:fontRef>
+        </p:style>
+      </p:cxnSp>
+      <p:graphicFrame>
+        <p:nvGraphicFramePr>
+          <p:cNvPr id="46" name="对象 -2147482608"/>
+          <p:cNvGraphicFramePr>
+            <a:graphicFrameLocks noChangeAspect="1"/>
+          </p:cNvGraphicFramePr>
+          <p:nvPr/>
+        </p:nvGraphicFramePr>
+        <p:xfrm>
+          <a:off x="1184495" y="918999"/>
+          <a:ext cx="239395" cy="191135"/>
+        </p:xfrm>
+        <a:graphic>
+          <a:graphicData uri="http://schemas.openxmlformats.org/presentationml/2006/ole">
+            <mc:AlternateContent xmlns:mc="http://schemas.openxmlformats.org/markup-compatibility/2006">
+              <mc:Choice xmlns:v="urn:schemas-microsoft-com:vml" Requires="v">
+                <p:oleObj spid="_x0000_s47" name="" r:id="rId19" imgW="246380" imgH="196850" progId="DSEquations">
+                  <p:embed/>
+                </p:oleObj>
+              </mc:Choice>
+              <mc:Fallback>
+                <p:oleObj name="" r:id="rId19" imgW="246380" imgH="196850" progId="DSEquations">
+                  <p:embed/>
+                  <p:pic>
+                    <p:nvPicPr>
+                      <p:cNvPr id="0" name="图片 3075"/>
+                      <p:cNvPicPr/>
+                      <p:nvPr/>
+                    </p:nvPicPr>
+                    <p:blipFill>
+                      <a:blip r:embed="rId20"/>
+                      <a:stretch>
+                        <a:fillRect/>
+                      </a:stretch>
+                    </p:blipFill>
+                    <p:spPr>
+                      <a:xfrm>
+                        <a:off x="1184495" y="918999"/>
+                        <a:ext cx="239395" cy="191135"/>
+                      </a:xfrm>
+                      <a:prstGeom prst="rect">
+                        <a:avLst/>
+                      </a:prstGeom>
+                      <a:noFill/>
+                      <a:ln w="38100">
+                        <a:noFill/>
+                        <a:miter/>
+                      </a:ln>
+                    </p:spPr>
+                  </p:pic>
+                </p:oleObj>
+              </mc:Fallback>
+            </mc:AlternateContent>
+          </a:graphicData>
+        </a:graphic>
+      </p:graphicFrame>
+      <p:graphicFrame>
+        <p:nvGraphicFramePr>
+          <p:cNvPr id="48" name="对象 -2147482608"/>
+          <p:cNvGraphicFramePr>
+            <a:graphicFrameLocks noChangeAspect="1"/>
+          </p:cNvGraphicFramePr>
+          <p:nvPr/>
+        </p:nvGraphicFramePr>
+        <p:xfrm>
+          <a:off x="721580" y="1327940"/>
+          <a:ext cx="234315" cy="196850"/>
+        </p:xfrm>
+        <a:graphic>
+          <a:graphicData uri="http://schemas.openxmlformats.org/presentationml/2006/ole">
+            <mc:AlternateContent xmlns:mc="http://schemas.openxmlformats.org/markup-compatibility/2006">
+              <mc:Choice xmlns:v="urn:schemas-microsoft-com:vml" Requires="v">
+                <p:oleObj spid="_x0000_s49" name="" r:id="rId21" imgW="241300" imgH="203200" progId="DSEquations">
+                  <p:embed/>
+                </p:oleObj>
+              </mc:Choice>
+              <mc:Fallback>
+                <p:oleObj name="" r:id="rId21" imgW="241300" imgH="203200" progId="DSEquations">
+                  <p:embed/>
+                  <p:pic>
+                    <p:nvPicPr>
+                      <p:cNvPr id="0" name="图片 3075"/>
+                      <p:cNvPicPr/>
+                      <p:nvPr/>
+                    </p:nvPicPr>
+                    <p:blipFill>
+                      <a:blip r:embed="rId22"/>
+                      <a:stretch>
+                        <a:fillRect/>
+                      </a:stretch>
+                    </p:blipFill>
+                    <p:spPr>
+                      <a:xfrm>
+                        <a:off x="721580" y="1327940"/>
+                        <a:ext cx="234315" cy="196850"/>
+                      </a:xfrm>
+                      <a:prstGeom prst="rect">
+                        <a:avLst/>
+                      </a:prstGeom>
+                      <a:noFill/>
+                      <a:ln w="38100">
+                        <a:noFill/>
+                        <a:miter/>
+                      </a:ln>
+                    </p:spPr>
+                  </p:pic>
+                </p:oleObj>
+              </mc:Fallback>
+            </mc:AlternateContent>
+          </a:graphicData>
+        </a:graphic>
+      </p:graphicFrame>
+      <p:graphicFrame>
+        <p:nvGraphicFramePr>
+          <p:cNvPr id="50" name="对象 -2147482608"/>
+          <p:cNvGraphicFramePr>
+            <a:graphicFrameLocks noChangeAspect="1"/>
+          </p:cNvGraphicFramePr>
+          <p:nvPr/>
+        </p:nvGraphicFramePr>
+        <p:xfrm>
+          <a:off x="56239" y="1327760"/>
+          <a:ext cx="356870" cy="184150"/>
+        </p:xfrm>
+        <a:graphic>
+          <a:graphicData uri="http://schemas.openxmlformats.org/presentationml/2006/ole">
+            <mc:AlternateContent xmlns:mc="http://schemas.openxmlformats.org/markup-compatibility/2006">
+              <mc:Choice xmlns:v="urn:schemas-microsoft-com:vml" Requires="v">
+                <p:oleObj spid="_x0000_s51" name="" r:id="rId23" imgW="368300" imgH="190500" progId="DSEquations">
+                  <p:embed/>
+                </p:oleObj>
+              </mc:Choice>
+              <mc:Fallback>
+                <p:oleObj name="" r:id="rId23" imgW="368300" imgH="190500" progId="DSEquations">
+                  <p:embed/>
+                  <p:pic>
+                    <p:nvPicPr>
+                      <p:cNvPr id="0" name="图片 3075"/>
+                      <p:cNvPicPr/>
+                      <p:nvPr/>
+                    </p:nvPicPr>
+                    <p:blipFill>
+                      <a:blip r:embed="rId24"/>
+                      <a:stretch>
+                        <a:fillRect/>
+                      </a:stretch>
+                    </p:blipFill>
+                    <p:spPr>
+                      <a:xfrm>
+                        <a:off x="56239" y="1327760"/>
+                        <a:ext cx="356870" cy="184150"/>
+                      </a:xfrm>
+                      <a:prstGeom prst="rect">
+                        <a:avLst/>
+                      </a:prstGeom>
+                      <a:noFill/>
+                      <a:ln w="38100">
+                        <a:noFill/>
+                        <a:miter/>
+                      </a:ln>
+                    </p:spPr>
+                  </p:pic>
+                </p:oleObj>
+              </mc:Fallback>
+            </mc:AlternateContent>
+          </a:graphicData>
+        </a:graphic>
+      </p:graphicFrame>
+      <p:sp>
+        <p:nvSpPr>
+          <p:cNvPr id="52" name="右箭头 51"/>
+          <p:cNvSpPr/>
+          <p:nvPr/>
+        </p:nvSpPr>
+        <p:spPr>
+          <a:xfrm>
+            <a:off x="419735" y="1382395"/>
+            <a:ext cx="241935" cy="75565"/>
+          </a:xfrm>
+          <a:prstGeom prst="rightArrow">
+            <a:avLst/>
+          </a:prstGeom>
+          <a:solidFill>
+            <a:schemeClr val="tx1"/>
+          </a:solidFill>
+        </p:spPr>
+        <p:style>
+          <a:lnRef idx="0">
+            <a:srgbClr val="FFFFFF"/>
+          </a:lnRef>
+          <a:fillRef idx="1">
+            <a:schemeClr val="accent1"/>
+          </a:fillRef>
+          <a:effectRef idx="0">
+            <a:srgbClr val="FFFFFF"/>
+          </a:effectRef>
+          <a:fontRef idx="minor">
+            <a:schemeClr val="lt1"/>
+          </a:fontRef>
+        </p:style>
+        <p:txBody>
+          <a:bodyPr rtlCol="0" anchor="ctr"/>
+          <a:p>
+            <a:pPr algn="ctr"/>
+            <a:endParaRPr lang="zh-CN" altLang="en-US"/>
+          </a:p>
+        </p:txBody>
+      </p:sp>
+      <p:graphicFrame>
+        <p:nvGraphicFramePr>
+          <p:cNvPr id="53" name="对象 -2147482608"/>
+          <p:cNvGraphicFramePr>
+            <a:graphicFrameLocks noChangeAspect="1"/>
+          </p:cNvGraphicFramePr>
+          <p:nvPr/>
+        </p:nvGraphicFramePr>
+        <p:xfrm>
+          <a:off x="727613" y="1605435"/>
+          <a:ext cx="222250" cy="196850"/>
+        </p:xfrm>
+        <a:graphic>
+          <a:graphicData uri="http://schemas.openxmlformats.org/presentationml/2006/ole">
+            <mc:AlternateContent xmlns:mc="http://schemas.openxmlformats.org/markup-compatibility/2006">
+              <mc:Choice xmlns:v="urn:schemas-microsoft-com:vml" Requires="v">
+                <p:oleObj spid="_x0000_s54" name="" r:id="rId25" imgW="228600" imgH="203200" progId="DSEquations">
+                  <p:embed/>
+                </p:oleObj>
+              </mc:Choice>
+              <mc:Fallback>
+                <p:oleObj name="" r:id="rId25" imgW="228600" imgH="203200" progId="DSEquations">
+                  <p:embed/>
+                  <p:pic>
+                    <p:nvPicPr>
+                      <p:cNvPr id="0" name="图片 3075"/>
+                      <p:cNvPicPr/>
+                      <p:nvPr/>
+                    </p:nvPicPr>
+                    <p:blipFill>
+                      <a:blip r:embed="rId26"/>
+                      <a:stretch>
+                        <a:fillRect/>
+                      </a:stretch>
+                    </p:blipFill>
+                    <p:spPr>
+                      <a:xfrm>
+                        <a:off x="727613" y="1605435"/>
+                        <a:ext cx="222250" cy="196850"/>
+                      </a:xfrm>
+                      <a:prstGeom prst="rect">
+                        <a:avLst/>
+                      </a:prstGeom>
+                      <a:noFill/>
+                      <a:ln w="38100">
+                        <a:noFill/>
+                        <a:miter/>
+                      </a:ln>
+                    </p:spPr>
+                  </p:pic>
+                </p:oleObj>
+              </mc:Fallback>
+            </mc:AlternateContent>
+          </a:graphicData>
+        </a:graphic>
+      </p:graphicFrame>
+      <p:graphicFrame>
+        <p:nvGraphicFramePr>
+          <p:cNvPr id="55" name="对象 -2147482608"/>
+          <p:cNvGraphicFramePr>
+            <a:graphicFrameLocks noChangeAspect="1"/>
+          </p:cNvGraphicFramePr>
+          <p:nvPr/>
+        </p:nvGraphicFramePr>
+        <p:xfrm>
+          <a:off x="56239" y="1605255"/>
+          <a:ext cx="356870" cy="184150"/>
+        </p:xfrm>
+        <a:graphic>
+          <a:graphicData uri="http://schemas.openxmlformats.org/presentationml/2006/ole">
+            <mc:AlternateContent xmlns:mc="http://schemas.openxmlformats.org/markup-compatibility/2006">
+              <mc:Choice xmlns:v="urn:schemas-microsoft-com:vml" Requires="v">
+                <p:oleObj spid="_x0000_s56" name="" r:id="rId27" imgW="368300" imgH="190500" progId="DSEquations">
+                  <p:embed/>
+                </p:oleObj>
+              </mc:Choice>
+              <mc:Fallback>
+                <p:oleObj name="" r:id="rId27" imgW="368300" imgH="190500" progId="DSEquations">
+                  <p:embed/>
+                  <p:pic>
+                    <p:nvPicPr>
+                      <p:cNvPr id="0" name="图片 3075"/>
+                      <p:cNvPicPr/>
+                      <p:nvPr/>
+                    </p:nvPicPr>
+                    <p:blipFill>
+                      <a:blip r:embed="rId28"/>
+                      <a:stretch>
+                        <a:fillRect/>
+                      </a:stretch>
+                    </p:blipFill>
+                    <p:spPr>
+                      <a:xfrm>
+                        <a:off x="56239" y="1605255"/>
+                        <a:ext cx="356870" cy="184150"/>
+                      </a:xfrm>
+                      <a:prstGeom prst="rect">
+                        <a:avLst/>
+                      </a:prstGeom>
+                      <a:noFill/>
+                      <a:ln w="38100">
+                        <a:noFill/>
+                        <a:miter/>
+                      </a:ln>
+                    </p:spPr>
+                  </p:pic>
+                </p:oleObj>
+              </mc:Fallback>
+            </mc:AlternateContent>
+          </a:graphicData>
+        </a:graphic>
+      </p:graphicFrame>
+      <p:sp>
+        <p:nvSpPr>
+          <p:cNvPr id="57" name="右箭头 56"/>
+          <p:cNvSpPr/>
+          <p:nvPr/>
+        </p:nvSpPr>
+        <p:spPr>
+          <a:xfrm>
+            <a:off x="419735" y="1659890"/>
+            <a:ext cx="241935" cy="75565"/>
+          </a:xfrm>
+          <a:prstGeom prst="rightArrow">
+            <a:avLst/>
+          </a:prstGeom>
+          <a:solidFill>
+            <a:schemeClr val="tx1"/>
+          </a:solidFill>
+        </p:spPr>
+        <p:style>
+          <a:lnRef idx="0">
+            <a:srgbClr val="FFFFFF"/>
+          </a:lnRef>
+          <a:fillRef idx="1">
+            <a:schemeClr val="accent1"/>
+          </a:fillRef>
+          <a:effectRef idx="0">
+            <a:srgbClr val="FFFFFF"/>
+          </a:effectRef>
+          <a:fontRef idx="minor">
+            <a:schemeClr val="lt1"/>
+          </a:fontRef>
+        </p:style>
+        <p:txBody>
+          <a:bodyPr rtlCol="0" anchor="ctr"/>
+          <a:p>
+            <a:pPr algn="ctr"/>
+            <a:endParaRPr lang="zh-CN" altLang="en-US"/>
+          </a:p>
+        </p:txBody>
+      </p:sp>
+      <p:cxnSp>
+        <p:nvCxnSpPr>
+          <p:cNvPr id="58" name="直接连接符 57"/>
+          <p:cNvCxnSpPr>
+            <a:stCxn id="60" idx="1"/>
+            <a:endCxn id="48" idx="3"/>
+          </p:cNvCxnSpPr>
+          <p:nvPr/>
+        </p:nvCxnSpPr>
+        <p:spPr>
+          <a:xfrm flipH="1" flipV="1">
+            <a:off x="955675" y="1426210"/>
+            <a:ext cx="228600" cy="130810"/>
+          </a:xfrm>
+          <a:prstGeom prst="line">
+            <a:avLst/>
+          </a:prstGeom>
+          <a:ln>
+            <a:headEnd type="triangle" w="sm" len="sm"/>
+          </a:ln>
+        </p:spPr>
+        <p:style>
+          <a:lnRef idx="2">
+            <a:schemeClr val="accent1"/>
+          </a:lnRef>
+          <a:fillRef idx="0">
+            <a:srgbClr val="FFFFFF"/>
+          </a:fillRef>
+          <a:effectRef idx="0">
+            <a:srgbClr val="FFFFFF"/>
+          </a:effectRef>
+          <a:fontRef idx="minor">
+            <a:schemeClr val="tx1"/>
+          </a:fontRef>
+        </p:style>
+      </p:cxnSp>
+      <p:cxnSp>
+        <p:nvCxnSpPr>
+          <p:cNvPr id="59" name="直接连接符 58"/>
+          <p:cNvCxnSpPr>
+            <a:stCxn id="60" idx="1"/>
+            <a:endCxn id="53" idx="3"/>
+          </p:cNvCxnSpPr>
+          <p:nvPr/>
+        </p:nvCxnSpPr>
+        <p:spPr>
+          <a:xfrm flipH="1">
+            <a:off x="949960" y="1557020"/>
+            <a:ext cx="234315" cy="146685"/>
+          </a:xfrm>
+          <a:prstGeom prst="line">
+            <a:avLst/>
+          </a:prstGeom>
+          <a:ln>
+            <a:headEnd type="triangle" w="sm" len="sm"/>
+          </a:ln>
+        </p:spPr>
+        <p:style>
+          <a:lnRef idx="2">
+            <a:schemeClr val="accent1"/>
+          </a:lnRef>
+          <a:fillRef idx="0">
+            <a:srgbClr val="FFFFFF"/>
+          </a:fillRef>
+          <a:effectRef idx="0">
+            <a:srgbClr val="FFFFFF"/>
+          </a:effectRef>
+          <a:fontRef idx="minor">
+            <a:schemeClr val="tx1"/>
+          </a:fontRef>
+        </p:style>
+      </p:cxnSp>
+      <p:graphicFrame>
+        <p:nvGraphicFramePr>
+          <p:cNvPr id="60" name="对象 -2147482608"/>
+          <p:cNvGraphicFramePr>
+            <a:graphicFrameLocks noChangeAspect="1"/>
+          </p:cNvGraphicFramePr>
+          <p:nvPr/>
+        </p:nvGraphicFramePr>
+        <p:xfrm>
+          <a:off x="1184495" y="1461289"/>
+          <a:ext cx="239395" cy="191135"/>
+        </p:xfrm>
+        <a:graphic>
+          <a:graphicData uri="http://schemas.openxmlformats.org/presentationml/2006/ole">
+            <mc:AlternateContent xmlns:mc="http://schemas.openxmlformats.org/markup-compatibility/2006">
+              <mc:Choice xmlns:v="urn:schemas-microsoft-com:vml" Requires="v">
+                <p:oleObj spid="_x0000_s61" name="" r:id="rId29" imgW="246380" imgH="196850" progId="DSEquations">
+                  <p:embed/>
+                </p:oleObj>
+              </mc:Choice>
+              <mc:Fallback>
+                <p:oleObj name="" r:id="rId29" imgW="246380" imgH="196850" progId="DSEquations">
+                  <p:embed/>
+                  <p:pic>
+                    <p:nvPicPr>
+                      <p:cNvPr id="0" name="图片 3075"/>
+                      <p:cNvPicPr/>
+                      <p:nvPr/>
+                    </p:nvPicPr>
+                    <p:blipFill>
+                      <a:blip r:embed="rId30"/>
+                      <a:stretch>
+                        <a:fillRect/>
+                      </a:stretch>
+                    </p:blipFill>
+                    <p:spPr>
+                      <a:xfrm>
+                        <a:off x="1184495" y="1461289"/>
+                        <a:ext cx="239395" cy="191135"/>
+                      </a:xfrm>
+                      <a:prstGeom prst="rect">
+                        <a:avLst/>
+                      </a:prstGeom>
+                      <a:noFill/>
+                      <a:ln w="38100">
+                        <a:noFill/>
+                        <a:miter/>
+                      </a:ln>
+                    </p:spPr>
+                  </p:pic>
+                </p:oleObj>
+              </mc:Fallback>
+            </mc:AlternateContent>
+          </a:graphicData>
+        </a:graphic>
+      </p:graphicFrame>
+      <p:graphicFrame>
+        <p:nvGraphicFramePr>
+          <p:cNvPr id="62" name="对象 -2147482608"/>
+          <p:cNvGraphicFramePr>
+            <a:graphicFrameLocks noChangeAspect="1"/>
+          </p:cNvGraphicFramePr>
+          <p:nvPr/>
+        </p:nvGraphicFramePr>
+        <p:xfrm>
+          <a:off x="1193385" y="645314"/>
+          <a:ext cx="234315" cy="196850"/>
+        </p:xfrm>
+        <a:graphic>
+          <a:graphicData uri="http://schemas.openxmlformats.org/presentationml/2006/ole">
+            <mc:AlternateContent xmlns:mc="http://schemas.openxmlformats.org/markup-compatibility/2006">
+              <mc:Choice xmlns:v="urn:schemas-microsoft-com:vml" Requires="v">
+                <p:oleObj spid="_x0000_s63" name="" r:id="rId31" imgW="241300" imgH="203200" progId="DSEquations">
+                  <p:embed/>
+                </p:oleObj>
+              </mc:Choice>
+              <mc:Fallback>
+                <p:oleObj name="" r:id="rId31" imgW="241300" imgH="203200" progId="DSEquations">
+                  <p:embed/>
+                  <p:pic>
+                    <p:nvPicPr>
+                      <p:cNvPr id="0" name="图片 3075"/>
+                      <p:cNvPicPr/>
+                      <p:nvPr/>
+                    </p:nvPicPr>
+                    <p:blipFill>
+                      <a:blip r:embed="rId32"/>
+                      <a:stretch>
+                        <a:fillRect/>
+                      </a:stretch>
+                    </p:blipFill>
+                    <p:spPr>
+                      <a:xfrm>
+                        <a:off x="1193385" y="645314"/>
+                        <a:ext cx="234315" cy="196850"/>
+                      </a:xfrm>
+                      <a:prstGeom prst="rect">
+                        <a:avLst/>
+                      </a:prstGeom>
+                      <a:noFill/>
+                      <a:ln w="38100">
+                        <a:noFill/>
+                        <a:miter/>
+                      </a:ln>
+                    </p:spPr>
+                  </p:pic>
+                </p:oleObj>
+              </mc:Fallback>
+            </mc:AlternateContent>
+          </a:graphicData>
+        </a:graphic>
+      </p:graphicFrame>
+      <p:cxnSp>
+        <p:nvCxnSpPr>
+          <p:cNvPr id="64" name="直接连接符 63"/>
+          <p:cNvCxnSpPr>
+            <a:stCxn id="62" idx="1"/>
+            <a:endCxn id="22" idx="3"/>
+          </p:cNvCxnSpPr>
+          <p:nvPr/>
+        </p:nvCxnSpPr>
+        <p:spPr>
+          <a:xfrm flipH="1" flipV="1">
+            <a:off x="943610" y="593725"/>
+            <a:ext cx="249555" cy="149860"/>
+          </a:xfrm>
+          <a:prstGeom prst="line">
+            <a:avLst/>
+          </a:prstGeom>
+          <a:ln>
+            <a:headEnd type="triangle" w="sm" len="sm"/>
+          </a:ln>
+        </p:spPr>
+        <p:style>
+          <a:lnRef idx="2">
+            <a:schemeClr val="accent1"/>
+          </a:lnRef>
+          <a:fillRef idx="0">
+            <a:srgbClr val="FFFFFF"/>
+          </a:fillRef>
+          <a:effectRef idx="0">
+            <a:srgbClr val="FFFFFF"/>
+          </a:effectRef>
+          <a:fontRef idx="minor">
+            <a:schemeClr val="tx1"/>
+          </a:fontRef>
+        </p:style>
+      </p:cxnSp>
+      <p:cxnSp>
+        <p:nvCxnSpPr>
+          <p:cNvPr id="65" name="直接连接符 64"/>
+          <p:cNvCxnSpPr>
+            <a:stCxn id="62" idx="1"/>
+            <a:endCxn id="34" idx="3"/>
+          </p:cNvCxnSpPr>
+          <p:nvPr/>
+        </p:nvCxnSpPr>
+        <p:spPr>
+          <a:xfrm flipH="1">
+            <a:off x="955675" y="743585"/>
+            <a:ext cx="237490" cy="127635"/>
+          </a:xfrm>
+          <a:prstGeom prst="line">
+            <a:avLst/>
+          </a:prstGeom>
+          <a:ln>
+            <a:headEnd type="triangle" w="sm" len="sm"/>
+          </a:ln>
+        </p:spPr>
+        <p:style>
+          <a:lnRef idx="2">
+            <a:schemeClr val="accent1"/>
+          </a:lnRef>
+          <a:fillRef idx="0">
+            <a:srgbClr val="FFFFFF"/>
+          </a:fillRef>
+          <a:effectRef idx="0">
+            <a:srgbClr val="FFFFFF"/>
+          </a:effectRef>
+          <a:fontRef idx="minor">
+            <a:schemeClr val="tx1"/>
+          </a:fontRef>
+        </p:style>
+      </p:cxnSp>
+      <p:cxnSp>
+        <p:nvCxnSpPr>
+          <p:cNvPr id="66" name="直接连接符 65"/>
+          <p:cNvCxnSpPr>
+            <a:stCxn id="68" idx="1"/>
+            <a:endCxn id="48" idx="3"/>
+          </p:cNvCxnSpPr>
+          <p:nvPr/>
+        </p:nvCxnSpPr>
+        <p:spPr>
+          <a:xfrm flipH="1">
+            <a:off x="955675" y="1285875"/>
+            <a:ext cx="234950" cy="140335"/>
+          </a:xfrm>
+          <a:prstGeom prst="line">
+            <a:avLst/>
+          </a:prstGeom>
+          <a:ln>
+            <a:headEnd type="triangle" w="sm" len="sm"/>
+          </a:ln>
+        </p:spPr>
+        <p:style>
+          <a:lnRef idx="2">
+            <a:schemeClr val="accent1"/>
+          </a:lnRef>
+          <a:fillRef idx="0">
+            <a:srgbClr val="FFFFFF"/>
+          </a:fillRef>
+          <a:effectRef idx="0">
+            <a:srgbClr val="FFFFFF"/>
+          </a:effectRef>
+          <a:fontRef idx="minor">
+            <a:schemeClr val="tx1"/>
+          </a:fontRef>
+        </p:style>
+      </p:cxnSp>
+      <p:cxnSp>
+        <p:nvCxnSpPr>
+          <p:cNvPr id="67" name="直接连接符 66"/>
+          <p:cNvCxnSpPr>
+            <a:stCxn id="68" idx="1"/>
+            <a:endCxn id="39" idx="3"/>
+          </p:cNvCxnSpPr>
+          <p:nvPr/>
+        </p:nvCxnSpPr>
+        <p:spPr>
+          <a:xfrm flipH="1" flipV="1">
+            <a:off x="949960" y="1148715"/>
+            <a:ext cx="240665" cy="137160"/>
+          </a:xfrm>
+          <a:prstGeom prst="line">
+            <a:avLst/>
+          </a:prstGeom>
+          <a:ln>
+            <a:headEnd type="triangle" w="sm" len="sm"/>
+          </a:ln>
+        </p:spPr>
+        <p:style>
+          <a:lnRef idx="2">
+            <a:schemeClr val="accent1"/>
+          </a:lnRef>
+          <a:fillRef idx="0">
+            <a:srgbClr val="FFFFFF"/>
+          </a:fillRef>
+          <a:effectRef idx="0">
+            <a:srgbClr val="FFFFFF"/>
+          </a:effectRef>
+          <a:fontRef idx="minor">
+            <a:schemeClr val="tx1"/>
+          </a:fontRef>
+        </p:style>
+      </p:cxnSp>
+      <p:graphicFrame>
+        <p:nvGraphicFramePr>
+          <p:cNvPr id="68" name="对象 -2147482608"/>
+          <p:cNvGraphicFramePr>
+            <a:graphicFrameLocks noChangeAspect="1"/>
+          </p:cNvGraphicFramePr>
+          <p:nvPr/>
+        </p:nvGraphicFramePr>
+        <p:xfrm>
+          <a:off x="1190529" y="1186969"/>
+          <a:ext cx="234950" cy="197485"/>
+        </p:xfrm>
+        <a:graphic>
+          <a:graphicData uri="http://schemas.openxmlformats.org/presentationml/2006/ole">
+            <mc:AlternateContent xmlns:mc="http://schemas.openxmlformats.org/markup-compatibility/2006">
+              <mc:Choice xmlns:v="urn:schemas-microsoft-com:vml" Requires="v">
+                <p:oleObj spid="_x0000_s69" name="" r:id="rId33" imgW="241300" imgH="203200" progId="DSEquations">
+                  <p:embed/>
+                </p:oleObj>
+              </mc:Choice>
+              <mc:Fallback>
+                <p:oleObj name="" r:id="rId33" imgW="241300" imgH="203200" progId="DSEquations">
+                  <p:embed/>
+                  <p:pic>
+                    <p:nvPicPr>
+                      <p:cNvPr id="0" name="图片 3075"/>
+                      <p:cNvPicPr/>
+                      <p:nvPr/>
+                    </p:nvPicPr>
+                    <p:blipFill>
+                      <a:blip r:embed="rId34"/>
+                      <a:stretch>
+                        <a:fillRect/>
+                      </a:stretch>
+                    </p:blipFill>
+                    <p:spPr>
+                      <a:xfrm>
+                        <a:off x="1190529" y="1186969"/>
+                        <a:ext cx="234950" cy="197485"/>
+                      </a:xfrm>
+                      <a:prstGeom prst="rect">
+                        <a:avLst/>
+                      </a:prstGeom>
+                      <a:noFill/>
+                      <a:ln w="38100">
+                        <a:noFill/>
+                        <a:miter/>
+                      </a:ln>
+                    </p:spPr>
+                  </p:pic>
+                </p:oleObj>
+              </mc:Fallback>
+            </mc:AlternateContent>
+          </a:graphicData>
+        </a:graphic>
+      </p:graphicFrame>
+      <p:graphicFrame>
+        <p:nvGraphicFramePr>
+          <p:cNvPr id="70" name="对象 -2147482608"/>
+          <p:cNvGraphicFramePr>
+            <a:graphicFrameLocks noChangeAspect="1"/>
+          </p:cNvGraphicFramePr>
+          <p:nvPr/>
+        </p:nvGraphicFramePr>
+        <p:xfrm>
+          <a:off x="1658840" y="527204"/>
+          <a:ext cx="234315" cy="196850"/>
+        </p:xfrm>
+        <a:graphic>
+          <a:graphicData uri="http://schemas.openxmlformats.org/presentationml/2006/ole">
+            <mc:AlternateContent xmlns:mc="http://schemas.openxmlformats.org/markup-compatibility/2006">
+              <mc:Choice xmlns:v="urn:schemas-microsoft-com:vml" Requires="v">
+                <p:oleObj spid="_x0000_s71" name="" r:id="rId35" imgW="241300" imgH="203200" progId="DSEquations">
+                  <p:embed/>
+                </p:oleObj>
+              </mc:Choice>
+              <mc:Fallback>
+                <p:oleObj name="" r:id="rId35" imgW="241300" imgH="203200" progId="DSEquations">
+                  <p:embed/>
+                  <p:pic>
+                    <p:nvPicPr>
+                      <p:cNvPr id="0" name="图片 3075"/>
+                      <p:cNvPicPr/>
+                      <p:nvPr/>
+                    </p:nvPicPr>
+                    <p:blipFill>
+                      <a:blip r:embed="rId36"/>
+                      <a:stretch>
+                        <a:fillRect/>
+                      </a:stretch>
+                    </p:blipFill>
+                    <p:spPr>
+                      <a:xfrm>
+                        <a:off x="1658840" y="527204"/>
+                        <a:ext cx="234315" cy="196850"/>
+                      </a:xfrm>
+                      <a:prstGeom prst="rect">
+                        <a:avLst/>
+                      </a:prstGeom>
+                      <a:noFill/>
+                      <a:ln w="38100">
+                        <a:noFill/>
+                        <a:miter/>
+                      </a:ln>
+                    </p:spPr>
+                  </p:pic>
+                </p:oleObj>
+              </mc:Fallback>
+            </mc:AlternateContent>
+          </a:graphicData>
+        </a:graphic>
+      </p:graphicFrame>
+      <p:cxnSp>
+        <p:nvCxnSpPr>
+          <p:cNvPr id="72" name="直接连接符 71"/>
+          <p:cNvCxnSpPr>
+            <a:stCxn id="70" idx="1"/>
+            <a:endCxn id="31" idx="3"/>
+          </p:cNvCxnSpPr>
+          <p:nvPr/>
+        </p:nvCxnSpPr>
+        <p:spPr>
+          <a:xfrm flipH="1" flipV="1">
+            <a:off x="1427480" y="469900"/>
+            <a:ext cx="231140" cy="155575"/>
+          </a:xfrm>
+          <a:prstGeom prst="line">
+            <a:avLst/>
+          </a:prstGeom>
+          <a:ln>
+            <a:headEnd type="triangle" w="sm" len="sm"/>
+          </a:ln>
+        </p:spPr>
+        <p:style>
+          <a:lnRef idx="2">
+            <a:schemeClr val="accent1"/>
+          </a:lnRef>
+          <a:fillRef idx="0">
+            <a:srgbClr val="FFFFFF"/>
+          </a:fillRef>
+          <a:effectRef idx="0">
+            <a:srgbClr val="FFFFFF"/>
+          </a:effectRef>
+          <a:fontRef idx="minor">
+            <a:schemeClr val="tx1"/>
+          </a:fontRef>
+        </p:style>
+      </p:cxnSp>
+      <p:cxnSp>
+        <p:nvCxnSpPr>
+          <p:cNvPr id="73" name="直接连接符 72"/>
+          <p:cNvCxnSpPr>
+            <a:stCxn id="70" idx="1"/>
+            <a:endCxn id="62" idx="3"/>
+          </p:cNvCxnSpPr>
+          <p:nvPr/>
+        </p:nvCxnSpPr>
+        <p:spPr>
+          <a:xfrm flipH="1">
+            <a:off x="1427480" y="625475"/>
+            <a:ext cx="231140" cy="118110"/>
+          </a:xfrm>
+          <a:prstGeom prst="line">
+            <a:avLst/>
+          </a:prstGeom>
+          <a:ln>
+            <a:headEnd type="triangle" w="sm" len="sm"/>
+          </a:ln>
+        </p:spPr>
+        <p:style>
+          <a:lnRef idx="2">
+            <a:schemeClr val="accent1"/>
+          </a:lnRef>
+          <a:fillRef idx="0">
+            <a:srgbClr val="FFFFFF"/>
+          </a:fillRef>
+          <a:effectRef idx="0">
+            <a:srgbClr val="FFFFFF"/>
+          </a:effectRef>
+          <a:fontRef idx="minor">
+            <a:schemeClr val="tx1"/>
+          </a:fontRef>
+        </p:style>
+      </p:cxnSp>
+      <p:graphicFrame>
+        <p:nvGraphicFramePr>
+          <p:cNvPr id="74" name="对象 -2147482608"/>
+          <p:cNvGraphicFramePr>
+            <a:graphicFrameLocks noChangeAspect="1"/>
+          </p:cNvGraphicFramePr>
+          <p:nvPr/>
+        </p:nvGraphicFramePr>
+        <p:xfrm>
+          <a:off x="1661380" y="798984"/>
+          <a:ext cx="222250" cy="196850"/>
+        </p:xfrm>
+        <a:graphic>
+          <a:graphicData uri="http://schemas.openxmlformats.org/presentationml/2006/ole">
+            <mc:AlternateContent xmlns:mc="http://schemas.openxmlformats.org/markup-compatibility/2006">
+              <mc:Choice xmlns:v="urn:schemas-microsoft-com:vml" Requires="v">
+                <p:oleObj spid="_x0000_s75" name="" r:id="rId37" imgW="228600" imgH="203200" progId="DSEquations">
+                  <p:embed/>
+                </p:oleObj>
+              </mc:Choice>
+              <mc:Fallback>
+                <p:oleObj name="" r:id="rId37" imgW="228600" imgH="203200" progId="DSEquations">
+                  <p:embed/>
+                  <p:pic>
+                    <p:nvPicPr>
+                      <p:cNvPr id="0" name="图片 3075"/>
+                      <p:cNvPicPr/>
+                      <p:nvPr/>
+                    </p:nvPicPr>
+                    <p:blipFill>
+                      <a:blip r:embed="rId38"/>
+                      <a:stretch>
+                        <a:fillRect/>
+                      </a:stretch>
+                    </p:blipFill>
+                    <p:spPr>
+                      <a:xfrm>
+                        <a:off x="1661380" y="798984"/>
+                        <a:ext cx="222250" cy="196850"/>
+                      </a:xfrm>
+                      <a:prstGeom prst="rect">
+                        <a:avLst/>
+                      </a:prstGeom>
+                      <a:noFill/>
+                      <a:ln w="38100">
+                        <a:noFill/>
+                        <a:miter/>
+                      </a:ln>
+                    </p:spPr>
+                  </p:pic>
+                </p:oleObj>
+              </mc:Fallback>
+            </mc:AlternateContent>
+          </a:graphicData>
+        </a:graphic>
+      </p:graphicFrame>
+      <p:cxnSp>
+        <p:nvCxnSpPr>
+          <p:cNvPr id="76" name="直接连接符 75"/>
+          <p:cNvCxnSpPr>
+            <a:stCxn id="74" idx="1"/>
+            <a:endCxn id="62" idx="3"/>
+          </p:cNvCxnSpPr>
+          <p:nvPr/>
+        </p:nvCxnSpPr>
+        <p:spPr>
+          <a:xfrm flipH="1" flipV="1">
+            <a:off x="1427480" y="743585"/>
+            <a:ext cx="233680" cy="153670"/>
+          </a:xfrm>
+          <a:prstGeom prst="line">
+            <a:avLst/>
+          </a:prstGeom>
+          <a:ln>
+            <a:headEnd type="triangle" w="sm" len="sm"/>
+          </a:ln>
+        </p:spPr>
+        <p:style>
+          <a:lnRef idx="2">
+            <a:schemeClr val="accent1"/>
+          </a:lnRef>
+          <a:fillRef idx="0">
+            <a:srgbClr val="FFFFFF"/>
+          </a:fillRef>
+          <a:effectRef idx="0">
+            <a:srgbClr val="FFFFFF"/>
+          </a:effectRef>
+          <a:fontRef idx="minor">
+            <a:schemeClr val="tx1"/>
+          </a:fontRef>
+        </p:style>
+      </p:cxnSp>
+      <p:cxnSp>
+        <p:nvCxnSpPr>
+          <p:cNvPr id="77" name="直接连接符 76"/>
+          <p:cNvCxnSpPr>
+            <a:stCxn id="74" idx="1"/>
+            <a:endCxn id="46" idx="3"/>
+          </p:cNvCxnSpPr>
+          <p:nvPr/>
+        </p:nvCxnSpPr>
+        <p:spPr>
+          <a:xfrm flipH="1">
+            <a:off x="1423670" y="897255"/>
+            <a:ext cx="237490" cy="117475"/>
+          </a:xfrm>
+          <a:prstGeom prst="line">
+            <a:avLst/>
+          </a:prstGeom>
+          <a:ln>
+            <a:headEnd type="triangle" w="sm" len="sm"/>
+          </a:ln>
+        </p:spPr>
+        <p:style>
+          <a:lnRef idx="2">
+            <a:schemeClr val="accent1"/>
+          </a:lnRef>
+          <a:fillRef idx="0">
+            <a:srgbClr val="FFFFFF"/>
+          </a:fillRef>
+          <a:effectRef idx="0">
+            <a:srgbClr val="FFFFFF"/>
+          </a:effectRef>
+          <a:fontRef idx="minor">
+            <a:schemeClr val="tx1"/>
+          </a:fontRef>
+        </p:style>
+      </p:cxnSp>
+      <p:graphicFrame>
+        <p:nvGraphicFramePr>
+          <p:cNvPr id="78" name="对象 -2147482608"/>
+          <p:cNvGraphicFramePr>
+            <a:graphicFrameLocks noChangeAspect="1"/>
+          </p:cNvGraphicFramePr>
+          <p:nvPr/>
+        </p:nvGraphicFramePr>
+        <p:xfrm>
+          <a:off x="1654713" y="1070764"/>
+          <a:ext cx="234315" cy="196850"/>
+        </p:xfrm>
+        <a:graphic>
+          <a:graphicData uri="http://schemas.openxmlformats.org/presentationml/2006/ole">
+            <mc:AlternateContent xmlns:mc="http://schemas.openxmlformats.org/markup-compatibility/2006">
+              <mc:Choice xmlns:v="urn:schemas-microsoft-com:vml" Requires="v">
+                <p:oleObj spid="_x0000_s79" name="" r:id="rId39" imgW="241300" imgH="203200" progId="DSEquations">
+                  <p:embed/>
+                </p:oleObj>
+              </mc:Choice>
+              <mc:Fallback>
+                <p:oleObj name="" r:id="rId39" imgW="241300" imgH="203200" progId="DSEquations">
+                  <p:embed/>
+                  <p:pic>
+                    <p:nvPicPr>
+                      <p:cNvPr id="0" name="图片 3075"/>
+                      <p:cNvPicPr/>
+                      <p:nvPr/>
+                    </p:nvPicPr>
+                    <p:blipFill>
+                      <a:blip r:embed="rId40"/>
+                      <a:stretch>
+                        <a:fillRect/>
+                      </a:stretch>
+                    </p:blipFill>
+                    <p:spPr>
+                      <a:xfrm>
+                        <a:off x="1654713" y="1070764"/>
+                        <a:ext cx="234315" cy="196850"/>
+                      </a:xfrm>
+                      <a:prstGeom prst="rect">
+                        <a:avLst/>
+                      </a:prstGeom>
+                      <a:noFill/>
+                      <a:ln w="38100">
+                        <a:noFill/>
+                        <a:miter/>
+                      </a:ln>
+                    </p:spPr>
+                  </p:pic>
+                </p:oleObj>
+              </mc:Fallback>
+            </mc:AlternateContent>
+          </a:graphicData>
+        </a:graphic>
+      </p:graphicFrame>
+      <p:cxnSp>
+        <p:nvCxnSpPr>
+          <p:cNvPr id="80" name="直接连接符 79"/>
+          <p:cNvCxnSpPr>
+            <a:stCxn id="78" idx="1"/>
+            <a:endCxn id="46" idx="3"/>
+          </p:cNvCxnSpPr>
+          <p:nvPr/>
+        </p:nvCxnSpPr>
+        <p:spPr>
+          <a:xfrm flipH="1" flipV="1">
+            <a:off x="1423670" y="1014730"/>
+            <a:ext cx="231140" cy="154305"/>
+          </a:xfrm>
+          <a:prstGeom prst="line">
+            <a:avLst/>
+          </a:prstGeom>
+          <a:ln>
+            <a:headEnd type="triangle" w="sm" len="sm"/>
+          </a:ln>
+        </p:spPr>
+        <p:style>
+          <a:lnRef idx="2">
+            <a:schemeClr val="accent1"/>
+          </a:lnRef>
+          <a:fillRef idx="0">
+            <a:srgbClr val="FFFFFF"/>
+          </a:fillRef>
+          <a:effectRef idx="0">
+            <a:srgbClr val="FFFFFF"/>
+          </a:effectRef>
+          <a:fontRef idx="minor">
+            <a:schemeClr val="tx1"/>
+          </a:fontRef>
+        </p:style>
+      </p:cxnSp>
+      <p:cxnSp>
+        <p:nvCxnSpPr>
+          <p:cNvPr id="81" name="直接连接符 80"/>
+          <p:cNvCxnSpPr>
+            <a:stCxn id="78" idx="1"/>
+            <a:endCxn id="68" idx="3"/>
+          </p:cNvCxnSpPr>
+          <p:nvPr/>
+        </p:nvCxnSpPr>
+        <p:spPr>
+          <a:xfrm flipH="1">
+            <a:off x="1425575" y="1169035"/>
+            <a:ext cx="229235" cy="116840"/>
+          </a:xfrm>
+          <a:prstGeom prst="line">
+            <a:avLst/>
+          </a:prstGeom>
+          <a:ln>
+            <a:headEnd type="triangle" w="sm" len="sm"/>
+          </a:ln>
+        </p:spPr>
+        <p:style>
+          <a:lnRef idx="2">
+            <a:schemeClr val="accent1"/>
+          </a:lnRef>
+          <a:fillRef idx="0">
+            <a:srgbClr val="FFFFFF"/>
+          </a:fillRef>
+          <a:effectRef idx="0">
+            <a:srgbClr val="FFFFFF"/>
+          </a:effectRef>
+          <a:fontRef idx="minor">
+            <a:schemeClr val="tx1"/>
+          </a:fontRef>
+        </p:style>
+      </p:cxnSp>
+      <p:graphicFrame>
+        <p:nvGraphicFramePr>
+          <p:cNvPr id="82" name="对象 -2147482608"/>
+          <p:cNvGraphicFramePr>
+            <a:graphicFrameLocks noChangeAspect="1"/>
+          </p:cNvGraphicFramePr>
+          <p:nvPr/>
+        </p:nvGraphicFramePr>
+        <p:xfrm>
+          <a:off x="1657570" y="1342544"/>
+          <a:ext cx="234315" cy="196850"/>
+        </p:xfrm>
+        <a:graphic>
+          <a:graphicData uri="http://schemas.openxmlformats.org/presentationml/2006/ole">
+            <mc:AlternateContent xmlns:mc="http://schemas.openxmlformats.org/markup-compatibility/2006">
+              <mc:Choice xmlns:v="urn:schemas-microsoft-com:vml" Requires="v">
+                <p:oleObj spid="_x0000_s83" name="" r:id="rId41" imgW="241300" imgH="203200" progId="DSEquations">
+                  <p:embed/>
+                </p:oleObj>
+              </mc:Choice>
+              <mc:Fallback>
+                <p:oleObj name="" r:id="rId41" imgW="241300" imgH="203200" progId="DSEquations">
+                  <p:embed/>
+                  <p:pic>
+                    <p:nvPicPr>
+                      <p:cNvPr id="0" name="图片 3075"/>
+                      <p:cNvPicPr/>
+                      <p:nvPr/>
+                    </p:nvPicPr>
+                    <p:blipFill>
+                      <a:blip r:embed="rId42"/>
+                      <a:stretch>
+                        <a:fillRect/>
+                      </a:stretch>
+                    </p:blipFill>
+                    <p:spPr>
+                      <a:xfrm>
+                        <a:off x="1657570" y="1342544"/>
+                        <a:ext cx="234315" cy="196850"/>
+                      </a:xfrm>
+                      <a:prstGeom prst="rect">
+                        <a:avLst/>
+                      </a:prstGeom>
+                      <a:noFill/>
+                      <a:ln w="38100">
+                        <a:noFill/>
+                        <a:miter/>
+                      </a:ln>
+                    </p:spPr>
+                  </p:pic>
+                </p:oleObj>
+              </mc:Fallback>
+            </mc:AlternateContent>
+          </a:graphicData>
+        </a:graphic>
+      </p:graphicFrame>
+      <p:cxnSp>
+        <p:nvCxnSpPr>
+          <p:cNvPr id="84" name="直接连接符 83"/>
+          <p:cNvCxnSpPr>
+            <a:stCxn id="82" idx="1"/>
+            <a:endCxn id="68" idx="3"/>
+          </p:cNvCxnSpPr>
+          <p:nvPr/>
+        </p:nvCxnSpPr>
+        <p:spPr>
+          <a:xfrm flipH="1" flipV="1">
+            <a:off x="1425575" y="1285875"/>
+            <a:ext cx="231775" cy="154940"/>
+          </a:xfrm>
+          <a:prstGeom prst="line">
+            <a:avLst/>
+          </a:prstGeom>
+          <a:ln>
+            <a:headEnd type="triangle" w="sm" len="sm"/>
+          </a:ln>
+        </p:spPr>
+        <p:style>
+          <a:lnRef idx="2">
+            <a:schemeClr val="accent1"/>
+          </a:lnRef>
+          <a:fillRef idx="0">
+            <a:srgbClr val="FFFFFF"/>
+          </a:fillRef>
+          <a:effectRef idx="0">
+            <a:srgbClr val="FFFFFF"/>
+          </a:effectRef>
+          <a:fontRef idx="minor">
+            <a:schemeClr val="tx1"/>
+          </a:fontRef>
+        </p:style>
+      </p:cxnSp>
+      <p:cxnSp>
+        <p:nvCxnSpPr>
+          <p:cNvPr id="85" name="直接连接符 84"/>
+          <p:cNvCxnSpPr>
+            <a:stCxn id="82" idx="1"/>
+            <a:endCxn id="60" idx="3"/>
+          </p:cNvCxnSpPr>
+          <p:nvPr/>
+        </p:nvCxnSpPr>
+        <p:spPr>
+          <a:xfrm flipH="1">
+            <a:off x="1423670" y="1440815"/>
+            <a:ext cx="233680" cy="116205"/>
+          </a:xfrm>
+          <a:prstGeom prst="line">
+            <a:avLst/>
+          </a:prstGeom>
+          <a:ln>
+            <a:headEnd type="triangle" w="sm" len="sm"/>
+          </a:ln>
+        </p:spPr>
+        <p:style>
+          <a:lnRef idx="2">
+            <a:schemeClr val="accent1"/>
+          </a:lnRef>
+          <a:fillRef idx="0">
+            <a:srgbClr val="FFFFFF"/>
+          </a:fillRef>
+          <a:effectRef idx="0">
+            <a:srgbClr val="FFFFFF"/>
+          </a:effectRef>
+          <a:fontRef idx="minor">
+            <a:schemeClr val="tx1"/>
+          </a:fontRef>
+        </p:style>
+      </p:cxnSp>
+      <p:graphicFrame>
+        <p:nvGraphicFramePr>
+          <p:cNvPr id="86" name="对象 -2147482608"/>
+          <p:cNvGraphicFramePr>
+            <a:graphicFrameLocks noChangeAspect="1"/>
+          </p:cNvGraphicFramePr>
+          <p:nvPr/>
+        </p:nvGraphicFramePr>
+        <p:xfrm>
+          <a:off x="2121120" y="660554"/>
+          <a:ext cx="247015" cy="196850"/>
+        </p:xfrm>
+        <a:graphic>
+          <a:graphicData uri="http://schemas.openxmlformats.org/presentationml/2006/ole">
+            <mc:AlternateContent xmlns:mc="http://schemas.openxmlformats.org/markup-compatibility/2006">
+              <mc:Choice xmlns:v="urn:schemas-microsoft-com:vml" Requires="v">
+                <p:oleObj spid="_x0000_s87" name="" r:id="rId43" imgW="254000" imgH="203200" progId="DSEquations">
+                  <p:embed/>
+                </p:oleObj>
+              </mc:Choice>
+              <mc:Fallback>
+                <p:oleObj name="" r:id="rId43" imgW="254000" imgH="203200" progId="DSEquations">
+                  <p:embed/>
+                  <p:pic>
+                    <p:nvPicPr>
+                      <p:cNvPr id="0" name="图片 3075"/>
+                      <p:cNvPicPr/>
+                      <p:nvPr/>
+                    </p:nvPicPr>
+                    <p:blipFill>
+                      <a:blip r:embed="rId44"/>
+                      <a:stretch>
+                        <a:fillRect/>
+                      </a:stretch>
+                    </p:blipFill>
+                    <p:spPr>
+                      <a:xfrm>
+                        <a:off x="2121120" y="660554"/>
+                        <a:ext cx="247015" cy="196850"/>
+                      </a:xfrm>
+                      <a:prstGeom prst="rect">
+                        <a:avLst/>
+                      </a:prstGeom>
+                      <a:noFill/>
+                      <a:ln w="38100">
+                        <a:noFill/>
+                        <a:miter/>
+                      </a:ln>
+                    </p:spPr>
+                  </p:pic>
+                </p:oleObj>
+              </mc:Fallback>
+            </mc:AlternateContent>
+          </a:graphicData>
+        </a:graphic>
+      </p:graphicFrame>
+      <p:cxnSp>
+        <p:nvCxnSpPr>
+          <p:cNvPr id="88" name="直接连接符 87"/>
+          <p:cNvCxnSpPr>
+            <a:stCxn id="86" idx="1"/>
+            <a:endCxn id="70" idx="3"/>
+          </p:cNvCxnSpPr>
+          <p:nvPr/>
+        </p:nvCxnSpPr>
+        <p:spPr>
+          <a:xfrm flipH="1" flipV="1">
+            <a:off x="1892935" y="625475"/>
+            <a:ext cx="227965" cy="133350"/>
+          </a:xfrm>
+          <a:prstGeom prst="line">
+            <a:avLst/>
+          </a:prstGeom>
+          <a:ln>
+            <a:headEnd type="triangle" w="sm" len="sm"/>
+          </a:ln>
+        </p:spPr>
+        <p:style>
+          <a:lnRef idx="2">
+            <a:schemeClr val="accent1"/>
+          </a:lnRef>
+          <a:fillRef idx="0">
+            <a:srgbClr val="FFFFFF"/>
+          </a:fillRef>
+          <a:effectRef idx="0">
+            <a:srgbClr val="FFFFFF"/>
+          </a:effectRef>
+          <a:fontRef idx="minor">
+            <a:schemeClr val="tx1"/>
+          </a:fontRef>
+        </p:style>
+      </p:cxnSp>
+      <p:cxnSp>
+        <p:nvCxnSpPr>
+          <p:cNvPr id="89" name="直接连接符 88"/>
+          <p:cNvCxnSpPr>
+            <a:stCxn id="86" idx="1"/>
+            <a:endCxn id="74" idx="3"/>
+          </p:cNvCxnSpPr>
+          <p:nvPr/>
+        </p:nvCxnSpPr>
+        <p:spPr>
+          <a:xfrm flipH="1">
+            <a:off x="1883410" y="758825"/>
+            <a:ext cx="237490" cy="138430"/>
+          </a:xfrm>
+          <a:prstGeom prst="line">
+            <a:avLst/>
+          </a:prstGeom>
+          <a:ln>
+            <a:headEnd type="triangle" w="sm" len="sm"/>
+          </a:ln>
+        </p:spPr>
+        <p:style>
+          <a:lnRef idx="2">
+            <a:schemeClr val="accent1"/>
+          </a:lnRef>
+          <a:fillRef idx="0">
+            <a:srgbClr val="FFFFFF"/>
+          </a:fillRef>
+          <a:effectRef idx="0">
+            <a:srgbClr val="FFFFFF"/>
+          </a:effectRef>
+          <a:fontRef idx="minor">
+            <a:schemeClr val="tx1"/>
+          </a:fontRef>
+        </p:style>
+      </p:cxnSp>
+      <p:graphicFrame>
+        <p:nvGraphicFramePr>
+          <p:cNvPr id="90" name="对象 -2147482608"/>
+          <p:cNvGraphicFramePr>
+            <a:graphicFrameLocks noChangeAspect="1"/>
+          </p:cNvGraphicFramePr>
+          <p:nvPr>
+            <p:custDataLst>
+              <p:tags r:id="rId45"/>
+            </p:custDataLst>
+          </p:nvPr>
+        </p:nvGraphicFramePr>
+        <p:xfrm>
+          <a:off x="2126201" y="932334"/>
+          <a:ext cx="234950" cy="196850"/>
+        </p:xfrm>
+        <a:graphic>
+          <a:graphicData uri="http://schemas.openxmlformats.org/presentationml/2006/ole">
+            <mc:AlternateContent xmlns:mc="http://schemas.openxmlformats.org/markup-compatibility/2006">
+              <mc:Choice xmlns:v="urn:schemas-microsoft-com:vml" Requires="v">
+                <p:oleObj spid="_x0000_s91" name="" r:id="rId46" imgW="241300" imgH="203200" progId="DSEquations">
+                  <p:embed/>
+                </p:oleObj>
+              </mc:Choice>
+              <mc:Fallback>
+                <p:oleObj name="" r:id="rId46" imgW="241300" imgH="203200" progId="DSEquations">
+                  <p:embed/>
+                  <p:pic>
+                    <p:nvPicPr>
+                      <p:cNvPr id="0" name="图片 3075"/>
+                      <p:cNvPicPr/>
+                      <p:nvPr/>
+                    </p:nvPicPr>
+                    <p:blipFill>
+                      <a:blip r:embed="rId47"/>
+                      <a:stretch>
+                        <a:fillRect/>
+                      </a:stretch>
+                    </p:blipFill>
+                    <p:spPr>
+                      <a:xfrm>
+                        <a:off x="2126201" y="932334"/>
+                        <a:ext cx="234950" cy="196850"/>
+                      </a:xfrm>
+                      <a:prstGeom prst="rect">
+                        <a:avLst/>
+                      </a:prstGeom>
+                      <a:noFill/>
+                      <a:ln w="38100">
+                        <a:noFill/>
+                        <a:miter/>
+                      </a:ln>
+                    </p:spPr>
+                  </p:pic>
+                </p:oleObj>
+              </mc:Fallback>
+            </mc:AlternateContent>
+          </a:graphicData>
+        </a:graphic>
+      </p:graphicFrame>
+      <p:cxnSp>
+        <p:nvCxnSpPr>
+          <p:cNvPr id="92" name="直接连接符 91"/>
+          <p:cNvCxnSpPr>
+            <a:stCxn id="90" idx="1"/>
+            <a:endCxn id="74" idx="3"/>
+          </p:cNvCxnSpPr>
+          <p:nvPr/>
+        </p:nvCxnSpPr>
+        <p:spPr>
+          <a:xfrm flipH="1" flipV="1">
+            <a:off x="1883410" y="897255"/>
+            <a:ext cx="242570" cy="133350"/>
+          </a:xfrm>
+          <a:prstGeom prst="line">
+            <a:avLst/>
+          </a:prstGeom>
+          <a:ln>
+            <a:headEnd type="triangle" w="sm" len="sm"/>
+          </a:ln>
+        </p:spPr>
+        <p:style>
+          <a:lnRef idx="2">
+            <a:schemeClr val="accent1"/>
+          </a:lnRef>
+          <a:fillRef idx="0">
+            <a:srgbClr val="FFFFFF"/>
+          </a:fillRef>
+          <a:effectRef idx="0">
+            <a:srgbClr val="FFFFFF"/>
+          </a:effectRef>
+          <a:fontRef idx="minor">
+            <a:schemeClr val="tx1"/>
+          </a:fontRef>
+        </p:style>
+      </p:cxnSp>
+      <p:cxnSp>
+        <p:nvCxnSpPr>
+          <p:cNvPr id="93" name="直接连接符 92"/>
+          <p:cNvCxnSpPr>
+            <a:stCxn id="90" idx="1"/>
+            <a:endCxn id="78" idx="3"/>
+          </p:cNvCxnSpPr>
+          <p:nvPr/>
+        </p:nvCxnSpPr>
+        <p:spPr>
+          <a:xfrm flipH="1">
+            <a:off x="1889125" y="1030605"/>
+            <a:ext cx="236855" cy="138430"/>
+          </a:xfrm>
+          <a:prstGeom prst="line">
+            <a:avLst/>
+          </a:prstGeom>
+          <a:ln>
+            <a:headEnd type="triangle" w="sm" len="sm"/>
+          </a:ln>
+        </p:spPr>
+        <p:style>
+          <a:lnRef idx="2">
+            <a:schemeClr val="accent1"/>
+          </a:lnRef>
+          <a:fillRef idx="0">
+            <a:srgbClr val="FFFFFF"/>
+          </a:fillRef>
+          <a:effectRef idx="0">
+            <a:srgbClr val="FFFFFF"/>
+          </a:effectRef>
+          <a:fontRef idx="minor">
+            <a:schemeClr val="tx1"/>
+          </a:fontRef>
+        </p:style>
+      </p:cxnSp>
+      <p:graphicFrame>
+        <p:nvGraphicFramePr>
+          <p:cNvPr id="94" name="对象 -2147482608"/>
+          <p:cNvGraphicFramePr>
+            <a:graphicFrameLocks noChangeAspect="1"/>
+          </p:cNvGraphicFramePr>
+          <p:nvPr>
+            <p:custDataLst>
+              <p:tags r:id="rId48"/>
+            </p:custDataLst>
+          </p:nvPr>
+        </p:nvGraphicFramePr>
+        <p:xfrm>
+          <a:off x="2121120" y="1204114"/>
+          <a:ext cx="247015" cy="196850"/>
+        </p:xfrm>
+        <a:graphic>
+          <a:graphicData uri="http://schemas.openxmlformats.org/presentationml/2006/ole">
+            <mc:AlternateContent xmlns:mc="http://schemas.openxmlformats.org/markup-compatibility/2006">
+              <mc:Choice xmlns:v="urn:schemas-microsoft-com:vml" Requires="v">
+                <p:oleObj spid="_x0000_s95" name="" r:id="rId49" imgW="254000" imgH="203200" progId="DSEquations">
+                  <p:embed/>
+                </p:oleObj>
+              </mc:Choice>
+              <mc:Fallback>
+                <p:oleObj name="" r:id="rId49" imgW="254000" imgH="203200" progId="DSEquations">
+                  <p:embed/>
+                  <p:pic>
+                    <p:nvPicPr>
+                      <p:cNvPr id="0" name="图片 3075"/>
+                      <p:cNvPicPr/>
+                      <p:nvPr/>
+                    </p:nvPicPr>
+                    <p:blipFill>
+                      <a:blip r:embed="rId50"/>
+                      <a:stretch>
+                        <a:fillRect/>
+                      </a:stretch>
+                    </p:blipFill>
+                    <p:spPr>
+                      <a:xfrm>
+                        <a:off x="2121120" y="1204114"/>
+                        <a:ext cx="247015" cy="196850"/>
+                      </a:xfrm>
+                      <a:prstGeom prst="rect">
+                        <a:avLst/>
+                      </a:prstGeom>
+                      <a:noFill/>
+                      <a:ln w="38100">
+                        <a:noFill/>
+                        <a:miter/>
+                      </a:ln>
+                    </p:spPr>
+                  </p:pic>
+                </p:oleObj>
+              </mc:Fallback>
+            </mc:AlternateContent>
+          </a:graphicData>
+        </a:graphic>
+      </p:graphicFrame>
+      <p:cxnSp>
+        <p:nvCxnSpPr>
+          <p:cNvPr id="96" name="直接连接符 95"/>
+          <p:cNvCxnSpPr>
+            <a:stCxn id="94" idx="1"/>
+            <a:endCxn id="78" idx="3"/>
+          </p:cNvCxnSpPr>
+          <p:nvPr/>
+        </p:nvCxnSpPr>
+        <p:spPr>
+          <a:xfrm flipH="1" flipV="1">
+            <a:off x="1889125" y="1169035"/>
+            <a:ext cx="231775" cy="133350"/>
+          </a:xfrm>
+          <a:prstGeom prst="line">
+            <a:avLst/>
+          </a:prstGeom>
+          <a:ln>
+            <a:headEnd type="triangle" w="sm" len="sm"/>
+          </a:ln>
+        </p:spPr>
+        <p:style>
+          <a:lnRef idx="2">
+            <a:schemeClr val="accent1"/>
+          </a:lnRef>
+          <a:fillRef idx="0">
+            <a:srgbClr val="FFFFFF"/>
+          </a:fillRef>
+          <a:effectRef idx="0">
+            <a:srgbClr val="FFFFFF"/>
+          </a:effectRef>
+          <a:fontRef idx="minor">
+            <a:schemeClr val="tx1"/>
+          </a:fontRef>
+        </p:style>
+      </p:cxnSp>
+      <p:cxnSp>
+        <p:nvCxnSpPr>
+          <p:cNvPr id="99" name="直接连接符 98"/>
+          <p:cNvCxnSpPr>
+            <a:stCxn id="94" idx="1"/>
+            <a:endCxn id="82" idx="3"/>
+          </p:cNvCxnSpPr>
+          <p:nvPr/>
+        </p:nvCxnSpPr>
+        <p:spPr>
+          <a:xfrm flipH="1">
+            <a:off x="1891665" y="1302385"/>
+            <a:ext cx="229235" cy="138430"/>
+          </a:xfrm>
+          <a:prstGeom prst="line">
+            <a:avLst/>
+          </a:prstGeom>
+          <a:ln>
+            <a:headEnd type="triangle" w="sm" len="sm"/>
+          </a:ln>
+        </p:spPr>
+        <p:style>
+          <a:lnRef idx="2">
+            <a:schemeClr val="accent1"/>
+          </a:lnRef>
+          <a:fillRef idx="0">
+            <a:srgbClr val="FFFFFF"/>
+          </a:fillRef>
+          <a:effectRef idx="0">
+            <a:srgbClr val="FFFFFF"/>
+          </a:effectRef>
+          <a:fontRef idx="minor">
+            <a:schemeClr val="tx1"/>
+          </a:fontRef>
+        </p:style>
+      </p:cxnSp>
+      <p:graphicFrame>
+        <p:nvGraphicFramePr>
+          <p:cNvPr id="100" name="对象 -2147482608"/>
+          <p:cNvGraphicFramePr>
+            <a:graphicFrameLocks noChangeAspect="1"/>
+          </p:cNvGraphicFramePr>
+          <p:nvPr/>
+        </p:nvGraphicFramePr>
+        <p:xfrm>
+          <a:off x="2598640" y="796444"/>
+          <a:ext cx="234315" cy="196850"/>
+        </p:xfrm>
+        <a:graphic>
+          <a:graphicData uri="http://schemas.openxmlformats.org/presentationml/2006/ole">
+            <mc:AlternateContent xmlns:mc="http://schemas.openxmlformats.org/markup-compatibility/2006">
+              <mc:Choice xmlns:v="urn:schemas-microsoft-com:vml" Requires="v">
+                <p:oleObj spid="_x0000_s101" name="" r:id="rId51" imgW="241300" imgH="203200" progId="DSEquations">
+                  <p:embed/>
+                </p:oleObj>
+              </mc:Choice>
+              <mc:Fallback>
+                <p:oleObj name="" r:id="rId51" imgW="241300" imgH="203200" progId="DSEquations">
+                  <p:embed/>
+                  <p:pic>
+                    <p:nvPicPr>
+                      <p:cNvPr id="0" name="图片 3075"/>
+                      <p:cNvPicPr/>
+                      <p:nvPr/>
+                    </p:nvPicPr>
+                    <p:blipFill>
+                      <a:blip r:embed="rId52"/>
+                      <a:stretch>
+                        <a:fillRect/>
+                      </a:stretch>
+                    </p:blipFill>
+                    <p:spPr>
+                      <a:xfrm>
+                        <a:off x="2598640" y="796444"/>
+                        <a:ext cx="234315" cy="196850"/>
+                      </a:xfrm>
+                      <a:prstGeom prst="rect">
+                        <a:avLst/>
+                      </a:prstGeom>
+                      <a:noFill/>
+                      <a:ln w="38100">
+                        <a:noFill/>
+                        <a:miter/>
+                      </a:ln>
+                    </p:spPr>
+                  </p:pic>
+                </p:oleObj>
+              </mc:Fallback>
+            </mc:AlternateContent>
+          </a:graphicData>
+        </a:graphic>
+      </p:graphicFrame>
+      <p:cxnSp>
+        <p:nvCxnSpPr>
+          <p:cNvPr id="102" name="直接连接符 101"/>
+          <p:cNvCxnSpPr>
+            <a:stCxn id="100" idx="1"/>
+            <a:endCxn id="86" idx="3"/>
+          </p:cNvCxnSpPr>
+          <p:nvPr/>
+        </p:nvCxnSpPr>
+        <p:spPr>
+          <a:xfrm flipH="1" flipV="1">
+            <a:off x="2367915" y="758825"/>
+            <a:ext cx="230505" cy="135890"/>
+          </a:xfrm>
+          <a:prstGeom prst="line">
+            <a:avLst/>
+          </a:prstGeom>
+          <a:ln>
+            <a:headEnd type="triangle" w="sm" len="sm"/>
+          </a:ln>
+        </p:spPr>
+        <p:style>
+          <a:lnRef idx="2">
+            <a:schemeClr val="accent1"/>
+          </a:lnRef>
+          <a:fillRef idx="0">
+            <a:srgbClr val="FFFFFF"/>
+          </a:fillRef>
+          <a:effectRef idx="0">
+            <a:srgbClr val="FFFFFF"/>
+          </a:effectRef>
+          <a:fontRef idx="minor">
+            <a:schemeClr val="tx1"/>
+          </a:fontRef>
+        </p:style>
+      </p:cxnSp>
+      <p:cxnSp>
+        <p:nvCxnSpPr>
+          <p:cNvPr id="103" name="直接连接符 102"/>
+          <p:cNvCxnSpPr>
+            <a:stCxn id="100" idx="1"/>
+            <a:endCxn id="90" idx="3"/>
+          </p:cNvCxnSpPr>
+          <p:nvPr/>
+        </p:nvCxnSpPr>
+        <p:spPr>
+          <a:xfrm flipH="1">
+            <a:off x="2360930" y="894715"/>
+            <a:ext cx="237490" cy="135890"/>
+          </a:xfrm>
+          <a:prstGeom prst="line">
+            <a:avLst/>
+          </a:prstGeom>
+          <a:ln>
+            <a:headEnd type="triangle" w="sm" len="sm"/>
+          </a:ln>
+        </p:spPr>
+        <p:style>
+          <a:lnRef idx="2">
+            <a:schemeClr val="accent1"/>
+          </a:lnRef>
+          <a:fillRef idx="0">
+            <a:srgbClr val="FFFFFF"/>
+          </a:fillRef>
+          <a:effectRef idx="0">
+            <a:srgbClr val="FFFFFF"/>
+          </a:effectRef>
+          <a:fontRef idx="minor">
+            <a:schemeClr val="tx1"/>
+          </a:fontRef>
+        </p:style>
+      </p:cxnSp>
+      <p:graphicFrame>
+        <p:nvGraphicFramePr>
+          <p:cNvPr id="104" name="对象 -2147482608"/>
+          <p:cNvGraphicFramePr>
+            <a:graphicFrameLocks noChangeAspect="1"/>
+          </p:cNvGraphicFramePr>
+          <p:nvPr/>
+        </p:nvGraphicFramePr>
+        <p:xfrm>
+          <a:off x="2603403" y="1068224"/>
+          <a:ext cx="222250" cy="196850"/>
+        </p:xfrm>
+        <a:graphic>
+          <a:graphicData uri="http://schemas.openxmlformats.org/presentationml/2006/ole">
+            <mc:AlternateContent xmlns:mc="http://schemas.openxmlformats.org/markup-compatibility/2006">
+              <mc:Choice xmlns:v="urn:schemas-microsoft-com:vml" Requires="v">
+                <p:oleObj spid="_x0000_s105" name="" r:id="rId53" imgW="228600" imgH="203200" progId="DSEquations">
+                  <p:embed/>
+                </p:oleObj>
+              </mc:Choice>
+              <mc:Fallback>
+                <p:oleObj name="" r:id="rId53" imgW="228600" imgH="203200" progId="DSEquations">
+                  <p:embed/>
+                  <p:pic>
+                    <p:nvPicPr>
+                      <p:cNvPr id="0" name="图片 3075"/>
+                      <p:cNvPicPr/>
+                      <p:nvPr/>
+                    </p:nvPicPr>
+                    <p:blipFill>
+                      <a:blip r:embed="rId54"/>
+                      <a:stretch>
+                        <a:fillRect/>
+                      </a:stretch>
+                    </p:blipFill>
+                    <p:spPr>
+                      <a:xfrm>
+                        <a:off x="2603403" y="1068224"/>
+                        <a:ext cx="222250" cy="196850"/>
+                      </a:xfrm>
+                      <a:prstGeom prst="rect">
+                        <a:avLst/>
+                      </a:prstGeom>
+                      <a:noFill/>
+                      <a:ln w="38100">
+                        <a:noFill/>
+                        <a:miter/>
+                      </a:ln>
+                    </p:spPr>
+                  </p:pic>
+                </p:oleObj>
+              </mc:Fallback>
+            </mc:AlternateContent>
+          </a:graphicData>
+        </a:graphic>
+      </p:graphicFrame>
+      <p:cxnSp>
+        <p:nvCxnSpPr>
+          <p:cNvPr id="106" name="直接连接符 105"/>
+          <p:cNvCxnSpPr>
+            <a:stCxn id="104" idx="1"/>
+            <a:endCxn id="90" idx="3"/>
+          </p:cNvCxnSpPr>
+          <p:nvPr/>
+        </p:nvCxnSpPr>
+        <p:spPr>
+          <a:xfrm flipH="1" flipV="1">
+            <a:off x="2360930" y="1030605"/>
+            <a:ext cx="242570" cy="135890"/>
+          </a:xfrm>
+          <a:prstGeom prst="line">
+            <a:avLst/>
+          </a:prstGeom>
+          <a:ln>
+            <a:headEnd type="triangle" w="sm" len="sm"/>
+          </a:ln>
+        </p:spPr>
+        <p:style>
+          <a:lnRef idx="2">
+            <a:schemeClr val="accent1"/>
+          </a:lnRef>
+          <a:fillRef idx="0">
+            <a:srgbClr val="FFFFFF"/>
+          </a:fillRef>
+          <a:effectRef idx="0">
+            <a:srgbClr val="FFFFFF"/>
+          </a:effectRef>
+          <a:fontRef idx="minor">
+            <a:schemeClr val="tx1"/>
+          </a:fontRef>
+        </p:style>
+      </p:cxnSp>
+      <p:cxnSp>
+        <p:nvCxnSpPr>
+          <p:cNvPr id="107" name="直接连接符 106"/>
+          <p:cNvCxnSpPr>
+            <a:stCxn id="104" idx="1"/>
+            <a:endCxn id="94" idx="3"/>
+          </p:cNvCxnSpPr>
+          <p:nvPr/>
+        </p:nvCxnSpPr>
+        <p:spPr>
+          <a:xfrm flipH="1">
+            <a:off x="2367915" y="1166495"/>
+            <a:ext cx="235585" cy="135890"/>
+          </a:xfrm>
+          <a:prstGeom prst="line">
+            <a:avLst/>
+          </a:prstGeom>
+          <a:ln>
+            <a:headEnd type="triangle" w="sm" len="sm"/>
+          </a:ln>
+        </p:spPr>
+        <p:style>
+          <a:lnRef idx="2">
+            <a:schemeClr val="accent1"/>
+          </a:lnRef>
+          <a:fillRef idx="0">
+            <a:srgbClr val="FFFFFF"/>
+          </a:fillRef>
+          <a:effectRef idx="0">
+            <a:srgbClr val="FFFFFF"/>
+          </a:effectRef>
+          <a:fontRef idx="minor">
+            <a:schemeClr val="tx1"/>
+          </a:fontRef>
+        </p:style>
+      </p:cxnSp>
+      <p:graphicFrame>
+        <p:nvGraphicFramePr>
+          <p:cNvPr id="108" name="对象 -2147482608"/>
+          <p:cNvGraphicFramePr>
+            <a:graphicFrameLocks noChangeAspect="1"/>
+          </p:cNvGraphicFramePr>
+          <p:nvPr/>
+        </p:nvGraphicFramePr>
+        <p:xfrm>
+          <a:off x="3053301" y="944399"/>
+          <a:ext cx="247015" cy="196850"/>
+        </p:xfrm>
+        <a:graphic>
+          <a:graphicData uri="http://schemas.openxmlformats.org/presentationml/2006/ole">
+            <mc:AlternateContent xmlns:mc="http://schemas.openxmlformats.org/markup-compatibility/2006">
+              <mc:Choice xmlns:v="urn:schemas-microsoft-com:vml" Requires="v">
+                <p:oleObj spid="_x0000_s109" name="" r:id="rId55" imgW="254000" imgH="203200" progId="DSEquations">
+                  <p:embed/>
+                </p:oleObj>
+              </mc:Choice>
+              <mc:Fallback>
+                <p:oleObj name="" r:id="rId55" imgW="254000" imgH="203200" progId="DSEquations">
+                  <p:embed/>
+                  <p:pic>
+                    <p:nvPicPr>
+                      <p:cNvPr id="0" name="图片 3075"/>
+                      <p:cNvPicPr/>
+                      <p:nvPr/>
+                    </p:nvPicPr>
+                    <p:blipFill>
+                      <a:blip r:embed="rId56"/>
+                      <a:stretch>
+                        <a:fillRect/>
+                      </a:stretch>
+                    </p:blipFill>
+                    <p:spPr>
+                      <a:xfrm>
+                        <a:off x="3053301" y="944399"/>
+                        <a:ext cx="247015" cy="196850"/>
+                      </a:xfrm>
+                      <a:prstGeom prst="rect">
+                        <a:avLst/>
+                      </a:prstGeom>
+                      <a:noFill/>
+                      <a:ln w="38100">
+                        <a:noFill/>
+                        <a:miter/>
+                      </a:ln>
+                    </p:spPr>
+                  </p:pic>
+                </p:oleObj>
+              </mc:Fallback>
+            </mc:AlternateContent>
+          </a:graphicData>
+        </a:graphic>
+      </p:graphicFrame>
+      <p:cxnSp>
+        <p:nvCxnSpPr>
+          <p:cNvPr id="110" name="直接连接符 109"/>
+          <p:cNvCxnSpPr>
+            <a:stCxn id="108" idx="1"/>
+            <a:endCxn id="100" idx="3"/>
+          </p:cNvCxnSpPr>
+          <p:nvPr/>
+        </p:nvCxnSpPr>
+        <p:spPr>
+          <a:xfrm flipH="1" flipV="1">
+            <a:off x="2832735" y="894715"/>
+            <a:ext cx="220345" cy="147955"/>
+          </a:xfrm>
+          <a:prstGeom prst="line">
+            <a:avLst/>
+          </a:prstGeom>
+          <a:ln>
+            <a:headEnd type="triangle" w="sm" len="sm"/>
+          </a:ln>
+        </p:spPr>
+        <p:style>
+          <a:lnRef idx="2">
+            <a:schemeClr val="accent1"/>
+          </a:lnRef>
+          <a:fillRef idx="0">
+            <a:srgbClr val="FFFFFF"/>
+          </a:fillRef>
+          <a:effectRef idx="0">
+            <a:srgbClr val="FFFFFF"/>
+          </a:effectRef>
+          <a:fontRef idx="minor">
+            <a:schemeClr val="tx1"/>
+          </a:fontRef>
+        </p:style>
+      </p:cxnSp>
+      <p:cxnSp>
+        <p:nvCxnSpPr>
+          <p:cNvPr id="111" name="直接连接符 110"/>
+          <p:cNvCxnSpPr>
+            <a:stCxn id="108" idx="1"/>
+            <a:endCxn id="104" idx="3"/>
+          </p:cNvCxnSpPr>
+          <p:nvPr/>
+        </p:nvCxnSpPr>
+        <p:spPr>
+          <a:xfrm flipH="1">
+            <a:off x="2825750" y="1042670"/>
+            <a:ext cx="227330" cy="123825"/>
+          </a:xfrm>
+          <a:prstGeom prst="line">
+            <a:avLst/>
+          </a:prstGeom>
+          <a:ln>
+            <a:headEnd type="triangle" w="sm" len="sm"/>
+          </a:ln>
+        </p:spPr>
+        <p:style>
+          <a:lnRef idx="2">
+            <a:schemeClr val="accent1"/>
+          </a:lnRef>
+          <a:fillRef idx="0">
+            <a:srgbClr val="FFFFFF"/>
+          </a:fillRef>
+          <a:effectRef idx="0">
+            <a:srgbClr val="FFFFFF"/>
+          </a:effectRef>
+          <a:fontRef idx="minor">
+            <a:schemeClr val="tx1"/>
+          </a:fontRef>
+        </p:style>
+      </p:cxnSp>
+      <p:sp>
+        <p:nvSpPr>
+          <p:cNvPr id="112" name="文本框 111"/>
+          <p:cNvSpPr txBox="1"/>
+          <p:nvPr/>
+        </p:nvSpPr>
+        <p:spPr>
+          <a:xfrm>
+            <a:off x="1537970" y="20638"/>
+            <a:ext cx="467360" cy="245110"/>
+          </a:xfrm>
+          <a:prstGeom prst="rect">
+            <a:avLst/>
+          </a:prstGeom>
+          <a:noFill/>
+        </p:spPr>
+        <p:txBody>
+          <a:bodyPr wrap="square" rtlCol="0">
+            <a:spAutoFit/>
+          </a:bodyPr>
+          <a:p>
+            <a:r>
+              <a:rPr lang="en-US" altLang="zh-CN" sz="1000">
+                <a:latin typeface="Times New Roman" panose="02020603050405020304" charset="0"/>
+                <a:ea typeface="宋体" panose="02010600030101010101" pitchFamily="2" charset="-122"/>
+                <a:cs typeface="Times New Roman" panose="02020603050405020304" charset="0"/>
+              </a:rPr>
+              <a:t>3</a:t>
+            </a:r>
+            <a:r>
+              <a:rPr lang="zh-CN" altLang="en-US" sz="1000">
+                <a:latin typeface="Times New Roman" panose="02020603050405020304" charset="0"/>
+                <a:ea typeface="宋体" panose="02010600030101010101" pitchFamily="2" charset="-122"/>
+                <a:cs typeface="Times New Roman" panose="02020603050405020304" charset="0"/>
+              </a:rPr>
+              <a:t>阶</a:t>
+            </a:r>
+            <a:endParaRPr lang="zh-CN" altLang="en-US" sz="1000">
+              <a:latin typeface="Times New Roman" panose="02020603050405020304" charset="0"/>
+              <a:ea typeface="宋体" panose="02010600030101010101" pitchFamily="2" charset="-122"/>
+              <a:cs typeface="Times New Roman" panose="02020603050405020304" charset="0"/>
+            </a:endParaRPr>
+          </a:p>
+        </p:txBody>
+      </p:sp>
+      <p:sp>
+        <p:nvSpPr>
+          <p:cNvPr id="113" name="文本框 112"/>
+          <p:cNvSpPr txBox="1"/>
+          <p:nvPr/>
+        </p:nvSpPr>
+        <p:spPr>
+          <a:xfrm>
+            <a:off x="2011045" y="20638"/>
+            <a:ext cx="467360" cy="245110"/>
+          </a:xfrm>
+          <a:prstGeom prst="rect">
+            <a:avLst/>
+          </a:prstGeom>
+          <a:noFill/>
+        </p:spPr>
+        <p:txBody>
+          <a:bodyPr wrap="square" rtlCol="0">
+            <a:spAutoFit/>
+          </a:bodyPr>
+          <a:p>
+            <a:r>
+              <a:rPr lang="en-US" altLang="zh-CN" sz="1000">
+                <a:latin typeface="Times New Roman" panose="02020603050405020304" charset="0"/>
+                <a:ea typeface="宋体" panose="02010600030101010101" pitchFamily="2" charset="-122"/>
+                <a:cs typeface="Times New Roman" panose="02020603050405020304" charset="0"/>
+              </a:rPr>
+              <a:t>4</a:t>
+            </a:r>
+            <a:r>
+              <a:rPr lang="zh-CN" altLang="en-US" sz="1000">
+                <a:latin typeface="Times New Roman" panose="02020603050405020304" charset="0"/>
+                <a:ea typeface="宋体" panose="02010600030101010101" pitchFamily="2" charset="-122"/>
+                <a:cs typeface="Times New Roman" panose="02020603050405020304" charset="0"/>
+              </a:rPr>
+              <a:t>阶</a:t>
+            </a:r>
+            <a:endParaRPr lang="zh-CN" altLang="en-US" sz="1000">
+              <a:latin typeface="Times New Roman" panose="02020603050405020304" charset="0"/>
+              <a:ea typeface="宋体" panose="02010600030101010101" pitchFamily="2" charset="-122"/>
+              <a:cs typeface="Times New Roman" panose="02020603050405020304" charset="0"/>
+            </a:endParaRPr>
+          </a:p>
+        </p:txBody>
+      </p:sp>
+      <p:sp>
+        <p:nvSpPr>
+          <p:cNvPr id="114" name="文本框 113"/>
+          <p:cNvSpPr txBox="1"/>
+          <p:nvPr/>
+        </p:nvSpPr>
+        <p:spPr>
+          <a:xfrm>
+            <a:off x="2507615" y="20638"/>
+            <a:ext cx="467360" cy="245110"/>
+          </a:xfrm>
+          <a:prstGeom prst="rect">
+            <a:avLst/>
+          </a:prstGeom>
+          <a:noFill/>
+        </p:spPr>
+        <p:txBody>
+          <a:bodyPr wrap="square" rtlCol="0">
+            <a:spAutoFit/>
+          </a:bodyPr>
+          <a:p>
+            <a:r>
+              <a:rPr lang="en-US" altLang="zh-CN" sz="1000">
+                <a:latin typeface="Times New Roman" panose="02020603050405020304" charset="0"/>
+                <a:ea typeface="宋体" panose="02010600030101010101" pitchFamily="2" charset="-122"/>
+                <a:cs typeface="Times New Roman" panose="02020603050405020304" charset="0"/>
+              </a:rPr>
+              <a:t>5</a:t>
+            </a:r>
+            <a:r>
+              <a:rPr lang="zh-CN" altLang="en-US" sz="1000">
+                <a:latin typeface="Times New Roman" panose="02020603050405020304" charset="0"/>
+                <a:ea typeface="宋体" panose="02010600030101010101" pitchFamily="2" charset="-122"/>
+                <a:cs typeface="Times New Roman" panose="02020603050405020304" charset="0"/>
+              </a:rPr>
+              <a:t>阶</a:t>
+            </a:r>
+            <a:endParaRPr lang="zh-CN" altLang="en-US" sz="1000">
+              <a:latin typeface="Times New Roman" panose="02020603050405020304" charset="0"/>
+              <a:ea typeface="宋体" panose="02010600030101010101" pitchFamily="2" charset="-122"/>
+              <a:cs typeface="Times New Roman" panose="02020603050405020304" charset="0"/>
+            </a:endParaRPr>
+          </a:p>
+        </p:txBody>
+      </p:sp>
+      <p:sp>
+        <p:nvSpPr>
+          <p:cNvPr id="115" name="文本框 114"/>
+          <p:cNvSpPr txBox="1"/>
+          <p:nvPr/>
+        </p:nvSpPr>
+        <p:spPr>
+          <a:xfrm>
+            <a:off x="2974975" y="20638"/>
+            <a:ext cx="467360" cy="245110"/>
+          </a:xfrm>
+          <a:prstGeom prst="rect">
+            <a:avLst/>
+          </a:prstGeom>
+          <a:noFill/>
+        </p:spPr>
+        <p:txBody>
+          <a:bodyPr wrap="square" rtlCol="0">
+            <a:spAutoFit/>
+          </a:bodyPr>
+          <a:p>
+            <a:r>
+              <a:rPr lang="en-US" altLang="zh-CN" sz="1000">
+                <a:latin typeface="Times New Roman" panose="02020603050405020304" charset="0"/>
+                <a:ea typeface="宋体" panose="02010600030101010101" pitchFamily="2" charset="-122"/>
+                <a:cs typeface="Times New Roman" panose="02020603050405020304" charset="0"/>
+              </a:rPr>
+              <a:t>6</a:t>
+            </a:r>
+            <a:r>
+              <a:rPr lang="zh-CN" altLang="en-US" sz="1000">
+                <a:latin typeface="Times New Roman" panose="02020603050405020304" charset="0"/>
+                <a:ea typeface="宋体" panose="02010600030101010101" pitchFamily="2" charset="-122"/>
+                <a:cs typeface="Times New Roman" panose="02020603050405020304" charset="0"/>
+              </a:rPr>
+              <a:t>阶</a:t>
+            </a:r>
+            <a:endParaRPr lang="zh-CN" altLang="en-US" sz="1000">
+              <a:latin typeface="Times New Roman" panose="02020603050405020304" charset="0"/>
+              <a:ea typeface="宋体" panose="02010600030101010101" pitchFamily="2" charset="-122"/>
+              <a:cs typeface="Times New Roman" panose="02020603050405020304" charset="0"/>
+            </a:endParaRPr>
+          </a:p>
+        </p:txBody>
+      </p:sp>
+      <p:graphicFrame>
+        <p:nvGraphicFramePr>
+          <p:cNvPr id="119" name="对象 -2147482608"/>
+          <p:cNvGraphicFramePr>
+            <a:graphicFrameLocks noChangeAspect="1"/>
+          </p:cNvGraphicFramePr>
+          <p:nvPr/>
+        </p:nvGraphicFramePr>
+        <p:xfrm>
+          <a:off x="3320953" y="992978"/>
+          <a:ext cx="148590" cy="74295"/>
+        </p:xfrm>
+        <a:graphic>
+          <a:graphicData uri="http://schemas.openxmlformats.org/presentationml/2006/ole">
+            <mc:AlternateContent xmlns:mc="http://schemas.openxmlformats.org/markup-compatibility/2006">
+              <mc:Choice xmlns:v="urn:schemas-microsoft-com:vml" Requires="v">
+                <p:oleObj spid="_x0000_s120" name="" r:id="rId57" imgW="152400" imgH="76200" progId="DSEquations">
+                  <p:embed/>
+                </p:oleObj>
+              </mc:Choice>
+              <mc:Fallback>
+                <p:oleObj name="" r:id="rId57" imgW="152400" imgH="76200" progId="DSEquations">
+                  <p:embed/>
+                  <p:pic>
+                    <p:nvPicPr>
+                      <p:cNvPr id="0" name="图片 3075"/>
+                      <p:cNvPicPr/>
+                      <p:nvPr/>
+                    </p:nvPicPr>
+                    <p:blipFill>
+                      <a:blip r:embed="rId58"/>
+                      <a:stretch>
+                        <a:fillRect/>
+                      </a:stretch>
+                    </p:blipFill>
+                    <p:spPr>
+                      <a:xfrm>
+                        <a:off x="3320953" y="992978"/>
+                        <a:ext cx="148590" cy="74295"/>
+                      </a:xfrm>
+                      <a:prstGeom prst="rect">
+                        <a:avLst/>
+                      </a:prstGeom>
+                      <a:noFill/>
+                      <a:ln w="38100">
+                        <a:noFill/>
+                        <a:miter/>
+                      </a:ln>
+                    </p:spPr>
+                  </p:pic>
+                </p:oleObj>
+              </mc:Fallback>
+            </mc:AlternateContent>
+          </a:graphicData>
+        </a:graphic>
+      </p:graphicFrame>
+      <p:graphicFrame>
+        <p:nvGraphicFramePr>
+          <p:cNvPr id="121" name="对象 -2147482608"/>
+          <p:cNvGraphicFramePr>
+            <a:graphicFrameLocks noChangeAspect="1"/>
+          </p:cNvGraphicFramePr>
+          <p:nvPr/>
+        </p:nvGraphicFramePr>
+        <p:xfrm>
+          <a:off x="197705" y="1829591"/>
+          <a:ext cx="74295" cy="148590"/>
+        </p:xfrm>
+        <a:graphic>
+          <a:graphicData uri="http://schemas.openxmlformats.org/presentationml/2006/ole">
+            <mc:AlternateContent xmlns:mc="http://schemas.openxmlformats.org/markup-compatibility/2006">
+              <mc:Choice xmlns:v="urn:schemas-microsoft-com:vml" Requires="v">
+                <p:oleObj spid="_x0000_s122" name="" r:id="rId59" imgW="76200" imgH="152400" progId="DSEquations">
+                  <p:embed/>
+                </p:oleObj>
+              </mc:Choice>
+              <mc:Fallback>
+                <p:oleObj name="" r:id="rId59" imgW="76200" imgH="152400" progId="DSEquations">
+                  <p:embed/>
+                  <p:pic>
+                    <p:nvPicPr>
+                      <p:cNvPr id="0" name="图片 3075"/>
+                      <p:cNvPicPr/>
+                      <p:nvPr/>
+                    </p:nvPicPr>
+                    <p:blipFill>
+                      <a:blip r:embed="rId60"/>
+                      <a:stretch>
+                        <a:fillRect/>
+                      </a:stretch>
+                    </p:blipFill>
+                    <p:spPr>
+                      <a:xfrm>
+                        <a:off x="197705" y="1829591"/>
+                        <a:ext cx="74295" cy="148590"/>
+                      </a:xfrm>
+                      <a:prstGeom prst="rect">
+                        <a:avLst/>
+                      </a:prstGeom>
+                      <a:noFill/>
+                      <a:ln w="38100">
+                        <a:noFill/>
+                        <a:miter/>
+                      </a:ln>
+                    </p:spPr>
+                  </p:pic>
+                </p:oleObj>
+              </mc:Fallback>
+            </mc:AlternateContent>
+          </a:graphicData>
+        </a:graphic>
+      </p:graphicFrame>
+      <p:graphicFrame>
+        <p:nvGraphicFramePr>
+          <p:cNvPr id="135" name="对象 -2147482608"/>
+          <p:cNvGraphicFramePr>
+            <a:graphicFrameLocks noChangeAspect="1"/>
+          </p:cNvGraphicFramePr>
+          <p:nvPr/>
+        </p:nvGraphicFramePr>
+        <p:xfrm>
+          <a:off x="818100" y="1789586"/>
+          <a:ext cx="74295" cy="148590"/>
+        </p:xfrm>
+        <a:graphic>
+          <a:graphicData uri="http://schemas.openxmlformats.org/presentationml/2006/ole">
+            <mc:AlternateContent xmlns:mc="http://schemas.openxmlformats.org/markup-compatibility/2006">
+              <mc:Choice xmlns:v="urn:schemas-microsoft-com:vml" Requires="v">
+                <p:oleObj spid="_x0000_s136" name="" r:id="rId61" imgW="76200" imgH="152400" progId="DSEquations">
+                  <p:embed/>
+                </p:oleObj>
+              </mc:Choice>
+              <mc:Fallback>
+                <p:oleObj name="" r:id="rId61" imgW="76200" imgH="152400" progId="DSEquations">
+                  <p:embed/>
+                  <p:pic>
+                    <p:nvPicPr>
+                      <p:cNvPr id="0" name="图片 3075"/>
+                      <p:cNvPicPr/>
+                      <p:nvPr/>
+                    </p:nvPicPr>
+                    <p:blipFill>
+                      <a:blip r:embed="rId60"/>
+                      <a:stretch>
+                        <a:fillRect/>
+                      </a:stretch>
+                    </p:blipFill>
+                    <p:spPr>
+                      <a:xfrm>
+                        <a:off x="818100" y="1789586"/>
+                        <a:ext cx="74295" cy="148590"/>
+                      </a:xfrm>
+                      <a:prstGeom prst="rect">
+                        <a:avLst/>
+                      </a:prstGeom>
+                      <a:noFill/>
+                      <a:ln w="38100">
+                        <a:noFill/>
+                        <a:miter/>
+                      </a:ln>
+                    </p:spPr>
+                  </p:pic>
+                </p:oleObj>
+              </mc:Fallback>
+            </mc:AlternateContent>
+          </a:graphicData>
+        </a:graphic>
+      </p:graphicFrame>
+      <p:graphicFrame>
+        <p:nvGraphicFramePr>
+          <p:cNvPr id="137" name="对象 -2147482608"/>
+          <p:cNvGraphicFramePr>
+            <a:graphicFrameLocks noChangeAspect="1"/>
+          </p:cNvGraphicFramePr>
+          <p:nvPr/>
+        </p:nvGraphicFramePr>
+        <p:xfrm>
+          <a:off x="1273395" y="1653696"/>
+          <a:ext cx="74295" cy="148590"/>
+        </p:xfrm>
+        <a:graphic>
+          <a:graphicData uri="http://schemas.openxmlformats.org/presentationml/2006/ole">
+            <mc:AlternateContent xmlns:mc="http://schemas.openxmlformats.org/markup-compatibility/2006">
+              <mc:Choice xmlns:v="urn:schemas-microsoft-com:vml" Requires="v">
+                <p:oleObj spid="_x0000_s138" name="" r:id="rId62" imgW="76200" imgH="152400" progId="DSEquations">
+                  <p:embed/>
+                </p:oleObj>
+              </mc:Choice>
+              <mc:Fallback>
+                <p:oleObj name="" r:id="rId62" imgW="76200" imgH="152400" progId="DSEquations">
+                  <p:embed/>
+                  <p:pic>
+                    <p:nvPicPr>
+                      <p:cNvPr id="0" name="图片 3075"/>
+                      <p:cNvPicPr/>
+                      <p:nvPr/>
+                    </p:nvPicPr>
+                    <p:blipFill>
+                      <a:blip r:embed="rId60"/>
+                      <a:stretch>
+                        <a:fillRect/>
+                      </a:stretch>
+                    </p:blipFill>
+                    <p:spPr>
+                      <a:xfrm>
+                        <a:off x="1273395" y="1653696"/>
+                        <a:ext cx="74295" cy="148590"/>
+                      </a:xfrm>
+                      <a:prstGeom prst="rect">
+                        <a:avLst/>
+                      </a:prstGeom>
+                      <a:noFill/>
+                      <a:ln w="38100">
+                        <a:noFill/>
+                        <a:miter/>
+                      </a:ln>
+                    </p:spPr>
+                  </p:pic>
+                </p:oleObj>
+              </mc:Fallback>
+            </mc:AlternateContent>
+          </a:graphicData>
+        </a:graphic>
+      </p:graphicFrame>
+      <p:graphicFrame>
+        <p:nvGraphicFramePr>
+          <p:cNvPr id="139" name="对象 -2147482608"/>
+          <p:cNvGraphicFramePr>
+            <a:graphicFrameLocks noChangeAspect="1"/>
+          </p:cNvGraphicFramePr>
+          <p:nvPr/>
+        </p:nvGraphicFramePr>
+        <p:xfrm>
+          <a:off x="1737580" y="1555271"/>
+          <a:ext cx="74295" cy="148590"/>
+        </p:xfrm>
+        <a:graphic>
+          <a:graphicData uri="http://schemas.openxmlformats.org/presentationml/2006/ole">
+            <mc:AlternateContent xmlns:mc="http://schemas.openxmlformats.org/markup-compatibility/2006">
+              <mc:Choice xmlns:v="urn:schemas-microsoft-com:vml" Requires="v">
+                <p:oleObj spid="_x0000_s140" name="" r:id="rId63" imgW="76200" imgH="152400" progId="DSEquations">
+                  <p:embed/>
+                </p:oleObj>
+              </mc:Choice>
+              <mc:Fallback>
+                <p:oleObj name="" r:id="rId63" imgW="76200" imgH="152400" progId="DSEquations">
+                  <p:embed/>
+                  <p:pic>
+                    <p:nvPicPr>
+                      <p:cNvPr id="0" name="图片 3075"/>
+                      <p:cNvPicPr/>
+                      <p:nvPr/>
+                    </p:nvPicPr>
+                    <p:blipFill>
+                      <a:blip r:embed="rId60"/>
+                      <a:stretch>
+                        <a:fillRect/>
+                      </a:stretch>
+                    </p:blipFill>
+                    <p:spPr>
+                      <a:xfrm>
+                        <a:off x="1737580" y="1555271"/>
+                        <a:ext cx="74295" cy="148590"/>
+                      </a:xfrm>
+                      <a:prstGeom prst="rect">
+                        <a:avLst/>
+                      </a:prstGeom>
+                      <a:noFill/>
+                      <a:ln w="38100">
+                        <a:noFill/>
+                        <a:miter/>
+                      </a:ln>
+                    </p:spPr>
+                  </p:pic>
+                </p:oleObj>
+              </mc:Fallback>
+            </mc:AlternateContent>
+          </a:graphicData>
+        </a:graphic>
+      </p:graphicFrame>
+      <p:graphicFrame>
+        <p:nvGraphicFramePr>
+          <p:cNvPr id="143" name="对象 -2147482608"/>
+          <p:cNvGraphicFramePr>
+            <a:graphicFrameLocks noChangeAspect="1"/>
+          </p:cNvGraphicFramePr>
+          <p:nvPr/>
+        </p:nvGraphicFramePr>
+        <p:xfrm>
+          <a:off x="2206210" y="1426366"/>
+          <a:ext cx="74295" cy="148590"/>
+        </p:xfrm>
+        <a:graphic>
+          <a:graphicData uri="http://schemas.openxmlformats.org/presentationml/2006/ole">
+            <mc:AlternateContent xmlns:mc="http://schemas.openxmlformats.org/markup-compatibility/2006">
+              <mc:Choice xmlns:v="urn:schemas-microsoft-com:vml" Requires="v">
+                <p:oleObj spid="_x0000_s144" name="" r:id="rId64" imgW="76200" imgH="152400" progId="DSEquations">
+                  <p:embed/>
+                </p:oleObj>
+              </mc:Choice>
+              <mc:Fallback>
+                <p:oleObj name="" r:id="rId64" imgW="76200" imgH="152400" progId="DSEquations">
+                  <p:embed/>
+                  <p:pic>
+                    <p:nvPicPr>
+                      <p:cNvPr id="0" name="图片 3075"/>
+                      <p:cNvPicPr/>
+                      <p:nvPr/>
+                    </p:nvPicPr>
+                    <p:blipFill>
+                      <a:blip r:embed="rId60"/>
+                      <a:stretch>
+                        <a:fillRect/>
+                      </a:stretch>
+                    </p:blipFill>
+                    <p:spPr>
+                      <a:xfrm>
+                        <a:off x="2206210" y="1426366"/>
+                        <a:ext cx="74295" cy="148590"/>
+                      </a:xfrm>
+                      <a:prstGeom prst="rect">
+                        <a:avLst/>
+                      </a:prstGeom>
+                      <a:noFill/>
+                      <a:ln w="38100">
+                        <a:noFill/>
+                        <a:miter/>
+                      </a:ln>
+                    </p:spPr>
+                  </p:pic>
+                </p:oleObj>
+              </mc:Fallback>
+            </mc:AlternateContent>
+          </a:graphicData>
+        </a:graphic>
+      </p:graphicFrame>
+      <p:graphicFrame>
+        <p:nvGraphicFramePr>
+          <p:cNvPr id="145" name="对象 -2147482608"/>
+          <p:cNvGraphicFramePr>
+            <a:graphicFrameLocks noChangeAspect="1"/>
+          </p:cNvGraphicFramePr>
+          <p:nvPr/>
+        </p:nvGraphicFramePr>
+        <p:xfrm>
+          <a:off x="2704050" y="1286031"/>
+          <a:ext cx="74295" cy="148590"/>
+        </p:xfrm>
+        <a:graphic>
+          <a:graphicData uri="http://schemas.openxmlformats.org/presentationml/2006/ole">
+            <mc:AlternateContent xmlns:mc="http://schemas.openxmlformats.org/markup-compatibility/2006">
+              <mc:Choice xmlns:v="urn:schemas-microsoft-com:vml" Requires="v">
+                <p:oleObj spid="_x0000_s146" name="" r:id="rId65" imgW="76200" imgH="152400" progId="DSEquations">
+                  <p:embed/>
+                </p:oleObj>
+              </mc:Choice>
+              <mc:Fallback>
+                <p:oleObj name="" r:id="rId65" imgW="76200" imgH="152400" progId="DSEquations">
+                  <p:embed/>
+                  <p:pic>
+                    <p:nvPicPr>
+                      <p:cNvPr id="0" name="图片 3075"/>
+                      <p:cNvPicPr/>
+                      <p:nvPr/>
+                    </p:nvPicPr>
+                    <p:blipFill>
+                      <a:blip r:embed="rId60"/>
+                      <a:stretch>
+                        <a:fillRect/>
+                      </a:stretch>
+                    </p:blipFill>
+                    <p:spPr>
+                      <a:xfrm>
+                        <a:off x="2704050" y="1286031"/>
+                        <a:ext cx="74295" cy="148590"/>
+                      </a:xfrm>
+                      <a:prstGeom prst="rect">
+                        <a:avLst/>
+                      </a:prstGeom>
+                      <a:noFill/>
+                      <a:ln w="38100">
+                        <a:noFill/>
+                        <a:miter/>
+                      </a:ln>
+                    </p:spPr>
+                  </p:pic>
+                </p:oleObj>
+              </mc:Fallback>
+            </mc:AlternateContent>
+          </a:graphicData>
+        </a:graphic>
+      </p:graphicFrame>
+      <p:graphicFrame>
+        <p:nvGraphicFramePr>
+          <p:cNvPr id="147" name="对象 -2147482608"/>
+          <p:cNvGraphicFramePr>
+            <a:graphicFrameLocks noChangeAspect="1"/>
+          </p:cNvGraphicFramePr>
+          <p:nvPr/>
+        </p:nvGraphicFramePr>
+        <p:xfrm>
+          <a:off x="3171410" y="1193956"/>
+          <a:ext cx="74295" cy="148590"/>
+        </p:xfrm>
+        <a:graphic>
+          <a:graphicData uri="http://schemas.openxmlformats.org/presentationml/2006/ole">
+            <mc:AlternateContent xmlns:mc="http://schemas.openxmlformats.org/markup-compatibility/2006">
+              <mc:Choice xmlns:v="urn:schemas-microsoft-com:vml" Requires="v">
+                <p:oleObj spid="_x0000_s148" name="" r:id="rId66" imgW="76200" imgH="152400" progId="DSEquations">
+                  <p:embed/>
+                </p:oleObj>
+              </mc:Choice>
+              <mc:Fallback>
+                <p:oleObj name="" r:id="rId66" imgW="76200" imgH="152400" progId="DSEquations">
+                  <p:embed/>
+                  <p:pic>
+                    <p:nvPicPr>
+                      <p:cNvPr id="0" name="图片 3075"/>
+                      <p:cNvPicPr/>
+                      <p:nvPr/>
+                    </p:nvPicPr>
+                    <p:blipFill>
+                      <a:blip r:embed="rId60"/>
+                      <a:stretch>
+                        <a:fillRect/>
+                      </a:stretch>
+                    </p:blipFill>
+                    <p:spPr>
+                      <a:xfrm>
+                        <a:off x="3171410" y="1193956"/>
+                        <a:ext cx="74295" cy="148590"/>
                       </a:xfrm>
                       <a:prstGeom prst="rect">
                         <a:avLst/>
@@ -3565,7 +7218,7 @@
       </p:graphicFrame>
     </p:spTree>
     <p:custDataLst>
-      <p:tags r:id="rId11"/>
+      <p:tags r:id="rId67"/>
     </p:custDataLst>
   </p:cSld>
   <p:clrMapOvr>
@@ -4348,6 +8001,18 @@
 
 <file path=ppt/tags/tag63.xml><?xml version="1.0" encoding="utf-8"?>
 <p:tagLst xmlns:p="http://schemas.openxmlformats.org/presentationml/2006/main">
+  <p:tag name="KSO_WM_UNIT_PLACING_PICTURE_USER_VIEWPORT" val="{&quot;height&quot;:310,&quot;width&quot;:370}"/>
+</p:tagLst>
+</file>
+
+<file path=ppt/tags/tag64.xml><?xml version="1.0" encoding="utf-8"?>
+<p:tagLst xmlns:p="http://schemas.openxmlformats.org/presentationml/2006/main">
+  <p:tag name="KSO_WM_UNIT_PLACING_PICTURE_USER_VIEWPORT" val="{&quot;height&quot;:310,&quot;width&quot;:389}"/>
+</p:tagLst>
+</file>
+
+<file path=ppt/tags/tag65.xml><?xml version="1.0" encoding="utf-8"?>
+<p:tagLst xmlns:p="http://schemas.openxmlformats.org/presentationml/2006/main">
   <p:tag name="KSO_WM_SLIDE_ID" val="custom20205081_1"/>
   <p:tag name="KSO_WM_TEMPLATE_SUBCATEGORY" val="19"/>
   <p:tag name="KSO_WM_TEMPLATE_MASTER_TYPE" val="0"/>
